--- a/FitStack_Zeroth_Review PRESENTATION.pptx
+++ b/FitStack_Zeroth_Review PRESENTATION.pptx
@@ -12,13 +12,13 @@
     <p:sldId id="257" r:id="rId3"/>
     <p:sldId id="258" r:id="rId4"/>
     <p:sldId id="259" r:id="rId5"/>
-    <p:sldId id="260" r:id="rId6"/>
-    <p:sldId id="261" r:id="rId7"/>
-    <p:sldId id="262" r:id="rId8"/>
-    <p:sldId id="263" r:id="rId9"/>
-    <p:sldId id="264" r:id="rId10"/>
-    <p:sldId id="265" r:id="rId11"/>
-    <p:sldId id="266" r:id="rId12"/>
+    <p:sldId id="274" r:id="rId6"/>
+    <p:sldId id="260" r:id="rId7"/>
+    <p:sldId id="261" r:id="rId8"/>
+    <p:sldId id="262" r:id="rId9"/>
+    <p:sldId id="263" r:id="rId10"/>
+    <p:sldId id="264" r:id="rId11"/>
+    <p:sldId id="265" r:id="rId12"/>
     <p:sldId id="267" r:id="rId13"/>
     <p:sldId id="268" r:id="rId14"/>
     <p:sldId id="269" r:id="rId15"/>
@@ -1290,7 +1290,13 @@
   <p:cSld>
     <p:spTree>
       <p:nvGrpSpPr>
-        <p:cNvPr id="1" name=""/>
+        <p:cNvPr id="1" name="">
+          <a:extLst>
+            <a:ext uri="{FF2B5EF4-FFF2-40B4-BE49-F238E27FC236}">
+              <a16:creationId xmlns:a16="http://schemas.microsoft.com/office/drawing/2014/main" id="{78EFBF0A-1BDA-0D2A-7EF8-943F1DF4D2E5}"/>
+            </a:ext>
+          </a:extLst>
+        </p:cNvPr>
         <p:cNvGrpSpPr/>
         <p:nvPr/>
       </p:nvGrpSpPr>
@@ -1304,7 +1310,13 @@
       </p:grpSpPr>
       <p:sp>
         <p:nvSpPr>
-          <p:cNvPr id="2" name="Slide Image Placeholder 1"/>
+          <p:cNvPr id="2" name="Slide Image Placeholder 1">
+            <a:extLst>
+              <a:ext uri="{FF2B5EF4-FFF2-40B4-BE49-F238E27FC236}">
+                <a16:creationId xmlns:a16="http://schemas.microsoft.com/office/drawing/2014/main" id="{C7FC1038-F9FC-7ED5-CC05-67E814A7C703}"/>
+              </a:ext>
+            </a:extLst>
+          </p:cNvPr>
           <p:cNvSpPr>
             <a:spLocks noGrp="1" noRot="1" noChangeAspect="1"/>
           </p:cNvSpPr>
@@ -1316,7 +1328,13 @@
       </p:sp>
       <p:sp>
         <p:nvSpPr>
-          <p:cNvPr id="3" name="Notes Placeholder 2"/>
+          <p:cNvPr id="3" name="Notes Placeholder 2">
+            <a:extLst>
+              <a:ext uri="{FF2B5EF4-FFF2-40B4-BE49-F238E27FC236}">
+                <a16:creationId xmlns:a16="http://schemas.microsoft.com/office/drawing/2014/main" id="{230B22F5-230D-C766-2143-1DA6C9A688F7}"/>
+              </a:ext>
+            </a:extLst>
+          </p:cNvPr>
           <p:cNvSpPr>
             <a:spLocks noGrp="1"/>
           </p:cNvSpPr>
@@ -1335,7 +1353,13 @@
       </p:sp>
       <p:sp>
         <p:nvSpPr>
-          <p:cNvPr id="4" name="Slide Number Placeholder 3"/>
+          <p:cNvPr id="4" name="Slide Number Placeholder 3">
+            <a:extLst>
+              <a:ext uri="{FF2B5EF4-FFF2-40B4-BE49-F238E27FC236}">
+                <a16:creationId xmlns:a16="http://schemas.microsoft.com/office/drawing/2014/main" id="{100B5CC5-F814-5653-C2C6-A075D1896060}"/>
+              </a:ext>
+            </a:extLst>
+          </p:cNvPr>
           <p:cNvSpPr>
             <a:spLocks noGrp="1"/>
           </p:cNvSpPr>
@@ -1359,7 +1383,7 @@
     </p:spTree>
     <p:extLst>
       <p:ext uri="{BB962C8B-B14F-4D97-AF65-F5344CB8AC3E}">
-        <p14:creationId xmlns:p14="http://schemas.microsoft.com/office/powerpoint/2010/main" val="1024086991"/>
+        <p14:creationId xmlns:p14="http://schemas.microsoft.com/office/powerpoint/2010/main" val="3622121424"/>
       </p:ext>
     </p:extLst>
   </p:cSld>
@@ -2551,6 +2575,830 @@
 
 <file path=ppt/slides/slide10.xml><?xml version="1.0" encoding="utf-8"?>
 <p:sld xmlns:a="http://schemas.openxmlformats.org/drawingml/2006/main" xmlns:r="http://schemas.openxmlformats.org/officeDocument/2006/relationships" xmlns:p="http://schemas.openxmlformats.org/presentationml/2006/main">
+  <p:cSld name="Slide 9">
+    <p:bg>
+      <p:bgPr>
+        <a:solidFill>
+          <a:srgbClr val="FFFFFF"/>
+        </a:solidFill>
+        <a:effectLst/>
+      </p:bgPr>
+    </p:bg>
+    <p:spTree>
+      <p:nvGrpSpPr>
+        <p:cNvPr id="1" name=""/>
+        <p:cNvGrpSpPr/>
+        <p:nvPr/>
+      </p:nvGrpSpPr>
+      <p:grpSpPr>
+        <a:xfrm>
+          <a:off x="0" y="0"/>
+          <a:ext cx="0" cy="0"/>
+          <a:chOff x="0" y="0"/>
+          <a:chExt cx="0" cy="0"/>
+        </a:xfrm>
+      </p:grpSpPr>
+      <p:sp>
+        <p:nvSpPr>
+          <p:cNvPr id="2" name="Text 0"/>
+          <p:cNvSpPr/>
+          <p:nvPr/>
+        </p:nvSpPr>
+        <p:spPr>
+          <a:xfrm>
+            <a:off x="457200" y="320040"/>
+            <a:ext cx="11274552" cy="548640"/>
+          </a:xfrm>
+          <a:prstGeom prst="rect">
+            <a:avLst/>
+          </a:prstGeom>
+          <a:noFill/>
+          <a:ln/>
+        </p:spPr>
+        <p:txBody>
+          <a:bodyPr wrap="square" lIns="0" tIns="0" rIns="0" bIns="0" rtlCol="0" anchor="ctr"/>
+          <a:lstStyle/>
+          <a:p>
+            <a:pPr marL="0" indent="0" algn="l">
+              <a:buNone/>
+            </a:pPr>
+            <a:r>
+              <a:rPr lang="en-US" sz="2800" b="1" dirty="0">
+                <a:solidFill>
+                  <a:srgbClr val="1F3B57"/>
+                </a:solidFill>
+                <a:latin typeface="Cambria" pitchFamily="34" charset="0"/>
+                <a:ea typeface="Cambria" pitchFamily="34" charset="-122"/>
+                <a:cs typeface="Cambria" pitchFamily="34" charset="-120"/>
+              </a:rPr>
+              <a:t>Relational Schema</a:t>
+            </a:r>
+            <a:endParaRPr lang="en-US" sz="2800" dirty="0"/>
+          </a:p>
+        </p:txBody>
+      </p:sp>
+      <p:sp>
+        <p:nvSpPr>
+          <p:cNvPr id="3" name="Text 1"/>
+          <p:cNvSpPr/>
+          <p:nvPr/>
+        </p:nvSpPr>
+        <p:spPr>
+          <a:xfrm>
+            <a:off x="457200" y="1188720"/>
+            <a:ext cx="5577840" cy="5212080"/>
+          </a:xfrm>
+          <a:prstGeom prst="rect">
+            <a:avLst/>
+          </a:prstGeom>
+          <a:noFill/>
+          <a:ln/>
+        </p:spPr>
+        <p:txBody>
+          <a:bodyPr wrap="square" lIns="25400" tIns="25400" rIns="25400" bIns="25400" rtlCol="0" anchor="t"/>
+          <a:lstStyle/>
+          <a:p>
+            <a:pPr marL="0" indent="0" algn="l">
+              <a:lnSpc>
+                <a:spcPts val="1400"/>
+              </a:lnSpc>
+              <a:buNone/>
+            </a:pPr>
+            <a:r>
+              <a:rPr lang="en-US" sz="1050" dirty="0">
+                <a:solidFill>
+                  <a:srgbClr val="262626"/>
+                </a:solidFill>
+                <a:latin typeface="Courier New" pitchFamily="34" charset="0"/>
+                <a:ea typeface="Courier New" pitchFamily="34" charset="-122"/>
+                <a:cs typeface="Courier New" pitchFamily="34" charset="-120"/>
+              </a:rPr>
+              <a:t>profiles(user_id_PK, name, goal, height,</a:t>
+            </a:r>
+            <a:endParaRPr lang="en-US" sz="1050" dirty="0"/>
+          </a:p>
+          <a:p>
+            <a:pPr marL="0" indent="0" algn="l">
+              <a:lnSpc>
+                <a:spcPts val="1400"/>
+              </a:lnSpc>
+              <a:buNone/>
+            </a:pPr>
+            <a:r>
+              <a:rPr lang="en-US" sz="1050" dirty="0">
+                <a:solidFill>
+                  <a:srgbClr val="262626"/>
+                </a:solidFill>
+                <a:latin typeface="Courier New" pitchFamily="34" charset="0"/>
+                <a:ea typeface="Courier New" pitchFamily="34" charset="-122"/>
+                <a:cs typeface="Courier New" pitchFamily="34" charset="-120"/>
+              </a:rPr>
+              <a:t>  onboarding_status, approval_status)</a:t>
+            </a:r>
+            <a:endParaRPr lang="en-US" sz="1050" dirty="0"/>
+          </a:p>
+          <a:p>
+            <a:pPr marL="0" indent="0" algn="l">
+              <a:lnSpc>
+                <a:spcPts val="1400"/>
+              </a:lnSpc>
+              <a:buNone/>
+            </a:pPr>
+            <a:endParaRPr lang="en-US" sz="1050" dirty="0"/>
+          </a:p>
+          <a:p>
+            <a:pPr marL="0" indent="0" algn="l">
+              <a:lnSpc>
+                <a:spcPts val="1400"/>
+              </a:lnSpc>
+              <a:buNone/>
+            </a:pPr>
+            <a:r>
+              <a:rPr lang="en-US" sz="1050" dirty="0">
+                <a:solidFill>
+                  <a:srgbClr val="262626"/>
+                </a:solidFill>
+                <a:latin typeface="Courier New" pitchFamily="34" charset="0"/>
+                <a:ea typeface="Courier New" pitchFamily="34" charset="-122"/>
+                <a:cs typeface="Courier New" pitchFamily="34" charset="-120"/>
+              </a:rPr>
+              <a:t>exercises(exercise_id_PK, name, muscle_group,</a:t>
+            </a:r>
+            <a:endParaRPr lang="en-US" sz="1050" dirty="0"/>
+          </a:p>
+          <a:p>
+            <a:pPr marL="0" indent="0" algn="l">
+              <a:lnSpc>
+                <a:spcPts val="1400"/>
+              </a:lnSpc>
+              <a:buNone/>
+            </a:pPr>
+            <a:r>
+              <a:rPr lang="en-US" sz="1050" dirty="0">
+                <a:solidFill>
+                  <a:srgbClr val="262626"/>
+                </a:solidFill>
+                <a:latin typeface="Courier New" pitchFamily="34" charset="0"/>
+                <a:ea typeface="Courier New" pitchFamily="34" charset="-122"/>
+                <a:cs typeface="Courier New" pitchFamily="34" charset="-120"/>
+              </a:rPr>
+              <a:t>  equipment, is_user_added, created_by_FK)</a:t>
+            </a:r>
+            <a:endParaRPr lang="en-US" sz="1050" dirty="0"/>
+          </a:p>
+          <a:p>
+            <a:pPr marL="0" indent="0" algn="l">
+              <a:lnSpc>
+                <a:spcPts val="1400"/>
+              </a:lnSpc>
+              <a:buNone/>
+            </a:pPr>
+            <a:endParaRPr lang="en-US" sz="1050" dirty="0"/>
+          </a:p>
+          <a:p>
+            <a:pPr marL="0" indent="0" algn="l">
+              <a:lnSpc>
+                <a:spcPts val="1400"/>
+              </a:lnSpc>
+              <a:buNone/>
+            </a:pPr>
+            <a:r>
+              <a:rPr lang="en-US" sz="1050" dirty="0">
+                <a:solidFill>
+                  <a:srgbClr val="262626"/>
+                </a:solidFill>
+                <a:latin typeface="Courier New" pitchFamily="34" charset="0"/>
+                <a:ea typeface="Courier New" pitchFamily="34" charset="-122"/>
+                <a:cs typeface="Courier New" pitchFamily="34" charset="-120"/>
+              </a:rPr>
+              <a:t>routines(routine_id_PK, user_id_FK, name, notes)</a:t>
+            </a:r>
+            <a:endParaRPr lang="en-US" sz="1050" dirty="0"/>
+          </a:p>
+          <a:p>
+            <a:pPr marL="0" indent="0" algn="l">
+              <a:lnSpc>
+                <a:spcPts val="1400"/>
+              </a:lnSpc>
+              <a:buNone/>
+            </a:pPr>
+            <a:endParaRPr lang="en-US" sz="1050" dirty="0"/>
+          </a:p>
+          <a:p>
+            <a:pPr marL="0" indent="0" algn="l">
+              <a:lnSpc>
+                <a:spcPts val="1400"/>
+              </a:lnSpc>
+              <a:buNone/>
+            </a:pPr>
+            <a:r>
+              <a:rPr lang="en-US" sz="1050" dirty="0">
+                <a:solidFill>
+                  <a:srgbClr val="262626"/>
+                </a:solidFill>
+                <a:latin typeface="Courier New" pitchFamily="34" charset="0"/>
+                <a:ea typeface="Courier New" pitchFamily="34" charset="-122"/>
+                <a:cs typeface="Courier New" pitchFamily="34" charset="-120"/>
+              </a:rPr>
+              <a:t>routine_exercises(routine_exercise_id_PK,</a:t>
+            </a:r>
+            <a:endParaRPr lang="en-US" sz="1050" dirty="0"/>
+          </a:p>
+          <a:p>
+            <a:pPr marL="0" indent="0" algn="l">
+              <a:lnSpc>
+                <a:spcPts val="1400"/>
+              </a:lnSpc>
+              <a:buNone/>
+            </a:pPr>
+            <a:r>
+              <a:rPr lang="en-US" sz="1050" dirty="0">
+                <a:solidFill>
+                  <a:srgbClr val="262626"/>
+                </a:solidFill>
+                <a:latin typeface="Courier New" pitchFamily="34" charset="0"/>
+                <a:ea typeface="Courier New" pitchFamily="34" charset="-122"/>
+                <a:cs typeface="Courier New" pitchFamily="34" charset="-120"/>
+              </a:rPr>
+              <a:t>  routine_id_FK, exercise_id_FK, order,</a:t>
+            </a:r>
+            <a:endParaRPr lang="en-US" sz="1050" dirty="0"/>
+          </a:p>
+          <a:p>
+            <a:pPr marL="0" indent="0" algn="l">
+              <a:lnSpc>
+                <a:spcPts val="1400"/>
+              </a:lnSpc>
+              <a:buNone/>
+            </a:pPr>
+            <a:r>
+              <a:rPr lang="en-US" sz="1050" dirty="0">
+                <a:solidFill>
+                  <a:srgbClr val="262626"/>
+                </a:solidFill>
+                <a:latin typeface="Courier New" pitchFamily="34" charset="0"/>
+                <a:ea typeface="Courier New" pitchFamily="34" charset="-122"/>
+                <a:cs typeface="Courier New" pitchFamily="34" charset="-120"/>
+              </a:rPr>
+              <a:t>  target_sets, target_reps)</a:t>
+            </a:r>
+            <a:endParaRPr lang="en-US" sz="1050" dirty="0"/>
+          </a:p>
+          <a:p>
+            <a:pPr marL="0" indent="0" algn="l">
+              <a:lnSpc>
+                <a:spcPts val="1400"/>
+              </a:lnSpc>
+              <a:buNone/>
+            </a:pPr>
+            <a:endParaRPr lang="en-US" sz="1050" dirty="0"/>
+          </a:p>
+          <a:p>
+            <a:pPr marL="0" indent="0" algn="l">
+              <a:lnSpc>
+                <a:spcPts val="1400"/>
+              </a:lnSpc>
+              <a:buNone/>
+            </a:pPr>
+            <a:r>
+              <a:rPr lang="en-US" sz="1050" dirty="0">
+                <a:solidFill>
+                  <a:srgbClr val="262626"/>
+                </a:solidFill>
+                <a:latin typeface="Courier New" pitchFamily="34" charset="0"/>
+                <a:ea typeface="Courier New" pitchFamily="34" charset="-122"/>
+                <a:cs typeface="Courier New" pitchFamily="34" charset="-120"/>
+              </a:rPr>
+              <a:t>workout_sessions(session_id_PK, user_id_FK,</a:t>
+            </a:r>
+            <a:endParaRPr lang="en-US" sz="1050" dirty="0"/>
+          </a:p>
+          <a:p>
+            <a:pPr marL="0" indent="0" algn="l">
+              <a:lnSpc>
+                <a:spcPts val="1400"/>
+              </a:lnSpc>
+              <a:buNone/>
+            </a:pPr>
+            <a:r>
+              <a:rPr lang="en-US" sz="1050" dirty="0">
+                <a:solidFill>
+                  <a:srgbClr val="262626"/>
+                </a:solidFill>
+                <a:latin typeface="Courier New" pitchFamily="34" charset="0"/>
+                <a:ea typeface="Courier New" pitchFamily="34" charset="-122"/>
+                <a:cs typeface="Courier New" pitchFamily="34" charset="-120"/>
+              </a:rPr>
+              <a:t>  routine_id_FK, date, start_time, end_time,</a:t>
+            </a:r>
+            <a:endParaRPr lang="en-US" sz="1050" dirty="0"/>
+          </a:p>
+          <a:p>
+            <a:pPr marL="0" indent="0" algn="l">
+              <a:lnSpc>
+                <a:spcPts val="1400"/>
+              </a:lnSpc>
+              <a:buNone/>
+            </a:pPr>
+            <a:r>
+              <a:rPr lang="en-US" sz="1050" dirty="0">
+                <a:solidFill>
+                  <a:srgbClr val="262626"/>
+                </a:solidFill>
+                <a:latin typeface="Courier New" pitchFamily="34" charset="0"/>
+                <a:ea typeface="Courier New" pitchFamily="34" charset="-122"/>
+                <a:cs typeface="Courier New" pitchFamily="34" charset="-120"/>
+              </a:rPr>
+              <a:t>  notes)</a:t>
+            </a:r>
+            <a:endParaRPr lang="en-US" sz="1050" dirty="0"/>
+          </a:p>
+          <a:p>
+            <a:pPr marL="0" indent="0" algn="l">
+              <a:lnSpc>
+                <a:spcPts val="1400"/>
+              </a:lnSpc>
+              <a:buNone/>
+            </a:pPr>
+            <a:endParaRPr lang="en-US" sz="1050" dirty="0"/>
+          </a:p>
+          <a:p>
+            <a:pPr marL="0" indent="0" algn="l">
+              <a:lnSpc>
+                <a:spcPts val="1400"/>
+              </a:lnSpc>
+              <a:buNone/>
+            </a:pPr>
+            <a:r>
+              <a:rPr lang="en-US" sz="1050" dirty="0">
+                <a:solidFill>
+                  <a:srgbClr val="262626"/>
+                </a:solidFill>
+                <a:latin typeface="Courier New" pitchFamily="34" charset="0"/>
+                <a:ea typeface="Courier New" pitchFamily="34" charset="-122"/>
+                <a:cs typeface="Courier New" pitchFamily="34" charset="-120"/>
+              </a:rPr>
+              <a:t>workout_sets(set_id_PK, session_id_FK,</a:t>
+            </a:r>
+            <a:endParaRPr lang="en-US" sz="1050" dirty="0"/>
+          </a:p>
+          <a:p>
+            <a:pPr marL="0" indent="0" algn="l">
+              <a:lnSpc>
+                <a:spcPts val="1400"/>
+              </a:lnSpc>
+              <a:buNone/>
+            </a:pPr>
+            <a:r>
+              <a:rPr lang="en-US" sz="1050" dirty="0">
+                <a:solidFill>
+                  <a:srgbClr val="262626"/>
+                </a:solidFill>
+                <a:latin typeface="Courier New" pitchFamily="34" charset="0"/>
+                <a:ea typeface="Courier New" pitchFamily="34" charset="-122"/>
+                <a:cs typeface="Courier New" pitchFamily="34" charset="-120"/>
+              </a:rPr>
+              <a:t>  exercise_id_FK, weight, reps, is_pr)</a:t>
+            </a:r>
+            <a:endParaRPr lang="en-US" sz="1050" dirty="0"/>
+          </a:p>
+        </p:txBody>
+      </p:sp>
+      <p:sp>
+        <p:nvSpPr>
+          <p:cNvPr id="4" name="Text 2"/>
+          <p:cNvSpPr/>
+          <p:nvPr/>
+        </p:nvSpPr>
+        <p:spPr>
+          <a:xfrm>
+            <a:off x="6172200" y="1188720"/>
+            <a:ext cx="5577840" cy="5212080"/>
+          </a:xfrm>
+          <a:prstGeom prst="rect">
+            <a:avLst/>
+          </a:prstGeom>
+          <a:noFill/>
+          <a:ln/>
+        </p:spPr>
+        <p:txBody>
+          <a:bodyPr wrap="square" lIns="25400" tIns="25400" rIns="25400" bIns="25400" rtlCol="0" anchor="t"/>
+          <a:lstStyle/>
+          <a:p>
+            <a:pPr marL="0" indent="0" algn="l">
+              <a:lnSpc>
+                <a:spcPts val="1400"/>
+              </a:lnSpc>
+              <a:buNone/>
+            </a:pPr>
+            <a:r>
+              <a:rPr lang="en-US" sz="1050" dirty="0">
+                <a:solidFill>
+                  <a:srgbClr val="262626"/>
+                </a:solidFill>
+                <a:latin typeface="Courier New" pitchFamily="34" charset="0"/>
+                <a:ea typeface="Courier New" pitchFamily="34" charset="-122"/>
+                <a:cs typeface="Courier New" pitchFamily="34" charset="-120"/>
+              </a:rPr>
+              <a:t>foods(food_id_PK, user_id_FK, name,</a:t>
+            </a:r>
+            <a:endParaRPr lang="en-US" sz="1050" dirty="0"/>
+          </a:p>
+          <a:p>
+            <a:pPr marL="0" indent="0" algn="l">
+              <a:lnSpc>
+                <a:spcPts val="1400"/>
+              </a:lnSpc>
+              <a:buNone/>
+            </a:pPr>
+            <a:r>
+              <a:rPr lang="en-US" sz="1050" dirty="0">
+                <a:solidFill>
+                  <a:srgbClr val="262626"/>
+                </a:solidFill>
+                <a:latin typeface="Courier New" pitchFamily="34" charset="0"/>
+                <a:ea typeface="Courier New" pitchFamily="34" charset="-122"/>
+                <a:cs typeface="Courier New" pitchFamily="34" charset="-120"/>
+              </a:rPr>
+              <a:t>  calories_per_100g, protein, carbs, fat,</a:t>
+            </a:r>
+            <a:endParaRPr lang="en-US" sz="1050" dirty="0"/>
+          </a:p>
+          <a:p>
+            <a:pPr marL="0" indent="0" algn="l">
+              <a:lnSpc>
+                <a:spcPts val="1400"/>
+              </a:lnSpc>
+              <a:buNone/>
+            </a:pPr>
+            <a:r>
+              <a:rPr lang="en-US" sz="1050" dirty="0">
+                <a:solidFill>
+                  <a:srgbClr val="262626"/>
+                </a:solidFill>
+                <a:latin typeface="Courier New" pitchFamily="34" charset="0"/>
+                <a:ea typeface="Courier New" pitchFamily="34" charset="-122"/>
+                <a:cs typeface="Courier New" pitchFamily="34" charset="-120"/>
+              </a:rPr>
+              <a:t>  is_custom)</a:t>
+            </a:r>
+            <a:endParaRPr lang="en-US" sz="1050" dirty="0"/>
+          </a:p>
+          <a:p>
+            <a:pPr marL="0" indent="0" algn="l">
+              <a:lnSpc>
+                <a:spcPts val="1400"/>
+              </a:lnSpc>
+              <a:buNone/>
+            </a:pPr>
+            <a:endParaRPr lang="en-US" sz="1050" dirty="0"/>
+          </a:p>
+          <a:p>
+            <a:pPr marL="0" indent="0" algn="l">
+              <a:lnSpc>
+                <a:spcPts val="1400"/>
+              </a:lnSpc>
+              <a:buNone/>
+            </a:pPr>
+            <a:r>
+              <a:rPr lang="en-US" sz="1050" dirty="0">
+                <a:solidFill>
+                  <a:srgbClr val="262626"/>
+                </a:solidFill>
+                <a:latin typeface="Courier New" pitchFamily="34" charset="0"/>
+                <a:ea typeface="Courier New" pitchFamily="34" charset="-122"/>
+                <a:cs typeface="Courier New" pitchFamily="34" charset="-120"/>
+              </a:rPr>
+              <a:t>food_logs(food_log_id_PK, user_id_FK,</a:t>
+            </a:r>
+            <a:endParaRPr lang="en-US" sz="1050" dirty="0"/>
+          </a:p>
+          <a:p>
+            <a:pPr marL="0" indent="0" algn="l">
+              <a:lnSpc>
+                <a:spcPts val="1400"/>
+              </a:lnSpc>
+              <a:buNone/>
+            </a:pPr>
+            <a:r>
+              <a:rPr lang="en-US" sz="1050" dirty="0">
+                <a:solidFill>
+                  <a:srgbClr val="262626"/>
+                </a:solidFill>
+                <a:latin typeface="Courier New" pitchFamily="34" charset="0"/>
+                <a:ea typeface="Courier New" pitchFamily="34" charset="-122"/>
+                <a:cs typeface="Courier New" pitchFamily="34" charset="-120"/>
+              </a:rPr>
+              <a:t>  food_id_FK, quantity, meal_type, date)</a:t>
+            </a:r>
+            <a:endParaRPr lang="en-US" sz="1050" dirty="0"/>
+          </a:p>
+          <a:p>
+            <a:pPr marL="0" indent="0" algn="l">
+              <a:lnSpc>
+                <a:spcPts val="1400"/>
+              </a:lnSpc>
+              <a:buNone/>
+            </a:pPr>
+            <a:endParaRPr lang="en-US" sz="1050" dirty="0"/>
+          </a:p>
+          <a:p>
+            <a:pPr marL="0" indent="0" algn="l">
+              <a:lnSpc>
+                <a:spcPts val="1400"/>
+              </a:lnSpc>
+              <a:buNone/>
+            </a:pPr>
+            <a:r>
+              <a:rPr lang="en-US" sz="1050" dirty="0">
+                <a:solidFill>
+                  <a:srgbClr val="262626"/>
+                </a:solidFill>
+                <a:latin typeface="Courier New" pitchFamily="34" charset="0"/>
+                <a:ea typeface="Courier New" pitchFamily="34" charset="-122"/>
+                <a:cs typeface="Courier New" pitchFamily="34" charset="-120"/>
+              </a:rPr>
+              <a:t>nutrition_targets(target_id_PK, user_id_FK,</a:t>
+            </a:r>
+            <a:endParaRPr lang="en-US" sz="1050" dirty="0"/>
+          </a:p>
+          <a:p>
+            <a:pPr marL="0" indent="0" algn="l">
+              <a:lnSpc>
+                <a:spcPts val="1400"/>
+              </a:lnSpc>
+              <a:buNone/>
+            </a:pPr>
+            <a:r>
+              <a:rPr lang="en-US" sz="1050" dirty="0">
+                <a:solidFill>
+                  <a:srgbClr val="262626"/>
+                </a:solidFill>
+                <a:latin typeface="Courier New" pitchFamily="34" charset="0"/>
+                <a:ea typeface="Courier New" pitchFamily="34" charset="-122"/>
+                <a:cs typeface="Courier New" pitchFamily="34" charset="-120"/>
+              </a:rPr>
+              <a:t>  date, calorie_target, protein_target,</a:t>
+            </a:r>
+            <a:endParaRPr lang="en-US" sz="1050" dirty="0"/>
+          </a:p>
+          <a:p>
+            <a:pPr marL="0" indent="0" algn="l">
+              <a:lnSpc>
+                <a:spcPts val="1400"/>
+              </a:lnSpc>
+              <a:buNone/>
+            </a:pPr>
+            <a:r>
+              <a:rPr lang="en-US" sz="1050" dirty="0">
+                <a:solidFill>
+                  <a:srgbClr val="262626"/>
+                </a:solidFill>
+                <a:latin typeface="Courier New" pitchFamily="34" charset="0"/>
+                <a:ea typeface="Courier New" pitchFamily="34" charset="-122"/>
+                <a:cs typeface="Courier New" pitchFamily="34" charset="-120"/>
+              </a:rPr>
+              <a:t>  carbs_target, fat_target, source)</a:t>
+            </a:r>
+            <a:endParaRPr lang="en-US" sz="1050" dirty="0"/>
+          </a:p>
+          <a:p>
+            <a:pPr marL="0" indent="0" algn="l">
+              <a:lnSpc>
+                <a:spcPts val="1400"/>
+              </a:lnSpc>
+              <a:buNone/>
+            </a:pPr>
+            <a:endParaRPr lang="en-US" sz="1050" dirty="0"/>
+          </a:p>
+          <a:p>
+            <a:pPr marL="0" indent="0" algn="l">
+              <a:lnSpc>
+                <a:spcPts val="1400"/>
+              </a:lnSpc>
+              <a:buNone/>
+            </a:pPr>
+            <a:r>
+              <a:rPr lang="en-US" sz="1050" dirty="0">
+                <a:solidFill>
+                  <a:srgbClr val="262626"/>
+                </a:solidFill>
+                <a:latin typeface="Courier New" pitchFamily="34" charset="0"/>
+                <a:ea typeface="Courier New" pitchFamily="34" charset="-122"/>
+                <a:cs typeface="Courier New" pitchFamily="34" charset="-120"/>
+              </a:rPr>
+              <a:t>tdee_estimates(tdee_id_PK, user_id_FK, date,</a:t>
+            </a:r>
+            <a:endParaRPr lang="en-US" sz="1050" dirty="0"/>
+          </a:p>
+          <a:p>
+            <a:pPr marL="0" indent="0" algn="l">
+              <a:lnSpc>
+                <a:spcPts val="1400"/>
+              </a:lnSpc>
+              <a:buNone/>
+            </a:pPr>
+            <a:r>
+              <a:rPr lang="en-US" sz="1050" dirty="0">
+                <a:solidFill>
+                  <a:srgbClr val="262626"/>
+                </a:solidFill>
+                <a:latin typeface="Courier New" pitchFamily="34" charset="0"/>
+                <a:ea typeface="Courier New" pitchFamily="34" charset="-122"/>
+                <a:cs typeface="Courier New" pitchFamily="34" charset="-120"/>
+              </a:rPr>
+              <a:t>  estimated_tdee)</a:t>
+            </a:r>
+            <a:endParaRPr lang="en-US" sz="1050" dirty="0"/>
+          </a:p>
+          <a:p>
+            <a:pPr marL="0" indent="0" algn="l">
+              <a:lnSpc>
+                <a:spcPts val="1400"/>
+              </a:lnSpc>
+              <a:buNone/>
+            </a:pPr>
+            <a:endParaRPr lang="en-US" sz="1050" dirty="0"/>
+          </a:p>
+          <a:p>
+            <a:pPr marL="0" indent="0" algn="l">
+              <a:lnSpc>
+                <a:spcPts val="1400"/>
+              </a:lnSpc>
+              <a:buNone/>
+            </a:pPr>
+            <a:r>
+              <a:rPr lang="en-US" sz="1050" dirty="0">
+                <a:solidFill>
+                  <a:srgbClr val="262626"/>
+                </a:solidFill>
+                <a:latin typeface="Courier New" pitchFamily="34" charset="0"/>
+                <a:ea typeface="Courier New" pitchFamily="34" charset="-122"/>
+                <a:cs typeface="Courier New" pitchFamily="34" charset="-120"/>
+              </a:rPr>
+              <a:t>dismissed_suggestions(dismissal_id_PK,</a:t>
+            </a:r>
+            <a:endParaRPr lang="en-US" sz="1050" dirty="0"/>
+          </a:p>
+          <a:p>
+            <a:pPr marL="0" indent="0" algn="l">
+              <a:lnSpc>
+                <a:spcPts val="1400"/>
+              </a:lnSpc>
+              <a:buNone/>
+            </a:pPr>
+            <a:r>
+              <a:rPr lang="en-US" sz="1050" dirty="0">
+                <a:solidFill>
+                  <a:srgbClr val="262626"/>
+                </a:solidFill>
+                <a:latin typeface="Courier New" pitchFamily="34" charset="0"/>
+                <a:ea typeface="Courier New" pitchFamily="34" charset="-122"/>
+                <a:cs typeface="Courier New" pitchFamily="34" charset="-120"/>
+              </a:rPr>
+              <a:t>  user_id_FK, suggestion_type, dismissed_at)</a:t>
+            </a:r>
+            <a:endParaRPr lang="en-US" sz="1050" dirty="0"/>
+          </a:p>
+          <a:p>
+            <a:pPr marL="0" indent="0" algn="l">
+              <a:lnSpc>
+                <a:spcPts val="1400"/>
+              </a:lnSpc>
+              <a:buNone/>
+            </a:pPr>
+            <a:endParaRPr lang="en-US" sz="1050" dirty="0"/>
+          </a:p>
+          <a:p>
+            <a:pPr marL="0" indent="0" algn="l">
+              <a:lnSpc>
+                <a:spcPts val="1400"/>
+              </a:lnSpc>
+              <a:buNone/>
+            </a:pPr>
+            <a:r>
+              <a:rPr lang="en-US" sz="1050" dirty="0">
+                <a:solidFill>
+                  <a:srgbClr val="262626"/>
+                </a:solidFill>
+                <a:latin typeface="Courier New" pitchFamily="34" charset="0"/>
+                <a:ea typeface="Courier New" pitchFamily="34" charset="-122"/>
+                <a:cs typeface="Courier New" pitchFamily="34" charset="-120"/>
+              </a:rPr>
+              <a:t>body_metrics(metric_id_PK, user_id_FK, date,</a:t>
+            </a:r>
+            <a:endParaRPr lang="en-US" sz="1050" dirty="0"/>
+          </a:p>
+          <a:p>
+            <a:pPr marL="0" indent="0" algn="l">
+              <a:lnSpc>
+                <a:spcPts val="1400"/>
+              </a:lnSpc>
+              <a:buNone/>
+            </a:pPr>
+            <a:r>
+              <a:rPr lang="en-US" sz="1050" dirty="0">
+                <a:solidFill>
+                  <a:srgbClr val="262626"/>
+                </a:solidFill>
+                <a:latin typeface="Courier New" pitchFamily="34" charset="0"/>
+                <a:ea typeface="Courier New" pitchFamily="34" charset="-122"/>
+                <a:cs typeface="Courier New" pitchFamily="34" charset="-120"/>
+              </a:rPr>
+              <a:t>  weight, waist, chest, arm, photo_url)</a:t>
+            </a:r>
+            <a:endParaRPr lang="en-US" sz="1050" dirty="0"/>
+          </a:p>
+        </p:txBody>
+      </p:sp>
+      <p:sp>
+        <p:nvSpPr>
+          <p:cNvPr id="5" name="Text 3"/>
+          <p:cNvSpPr/>
+          <p:nvPr/>
+        </p:nvSpPr>
+        <p:spPr>
+          <a:xfrm>
+            <a:off x="11612880" y="6537960"/>
+            <a:ext cx="457200" cy="274320"/>
+          </a:xfrm>
+          <a:prstGeom prst="rect">
+            <a:avLst/>
+          </a:prstGeom>
+          <a:noFill/>
+          <a:ln/>
+        </p:spPr>
+        <p:txBody>
+          <a:bodyPr wrap="square" lIns="0" tIns="0" rIns="0" bIns="0" rtlCol="0" anchor="ctr"/>
+          <a:lstStyle/>
+          <a:p>
+            <a:pPr marL="0" indent="0" algn="r">
+              <a:buNone/>
+            </a:pPr>
+            <a:r>
+              <a:rPr lang="en-US" sz="1000" dirty="0">
+                <a:solidFill>
+                  <a:srgbClr val="8C8C8C"/>
+                </a:solidFill>
+                <a:latin typeface="Calibri" pitchFamily="34" charset="0"/>
+                <a:ea typeface="Calibri" pitchFamily="34" charset="-122"/>
+                <a:cs typeface="Calibri" pitchFamily="34" charset="-120"/>
+              </a:rPr>
+              <a:t>9</a:t>
+            </a:r>
+            <a:endParaRPr lang="en-US" sz="1000" dirty="0"/>
+          </a:p>
+        </p:txBody>
+      </p:sp>
+      <p:sp>
+        <p:nvSpPr>
+          <p:cNvPr id="6" name="Text 4"/>
+          <p:cNvSpPr/>
+          <p:nvPr/>
+        </p:nvSpPr>
+        <p:spPr>
+          <a:xfrm>
+            <a:off x="457200" y="6537960"/>
+            <a:ext cx="4572000" cy="274320"/>
+          </a:xfrm>
+          <a:prstGeom prst="rect">
+            <a:avLst/>
+          </a:prstGeom>
+          <a:noFill/>
+          <a:ln/>
+        </p:spPr>
+        <p:txBody>
+          <a:bodyPr wrap="square" lIns="0" tIns="0" rIns="0" bIns="0" rtlCol="0" anchor="ctr"/>
+          <a:lstStyle/>
+          <a:p>
+            <a:pPr marL="0" indent="0" algn="l">
+              <a:buNone/>
+            </a:pPr>
+            <a:r>
+              <a:rPr lang="en-US" sz="900" dirty="0">
+                <a:solidFill>
+                  <a:srgbClr val="8C8C8C"/>
+                </a:solidFill>
+                <a:latin typeface="Calibri" pitchFamily="34" charset="0"/>
+                <a:ea typeface="Calibri" pitchFamily="34" charset="-122"/>
+                <a:cs typeface="Calibri" pitchFamily="34" charset="-120"/>
+              </a:rPr>
+              <a:t>FitStack — DBMS Zeroth Review</a:t>
+            </a:r>
+            <a:endParaRPr lang="en-US" sz="900" dirty="0"/>
+          </a:p>
+        </p:txBody>
+      </p:sp>
+    </p:spTree>
+  </p:cSld>
+  <p:clrMapOvr>
+    <a:masterClrMapping/>
+  </p:clrMapOvr>
+</p:sld>
+</file>
+
+<file path=ppt/slides/slide11.xml><?xml version="1.0" encoding="utf-8"?>
+<p:sld xmlns:a="http://schemas.openxmlformats.org/drawingml/2006/main" xmlns:r="http://schemas.openxmlformats.org/officeDocument/2006/relationships" xmlns:p="http://schemas.openxmlformats.org/presentationml/2006/main">
   <p:cSld name="Slide 10">
     <p:bg>
       <p:bgPr>
@@ -3498,1026 +4346,6 @@
       <p:sp>
         <p:nvSpPr>
           <p:cNvPr id="31" name="Text 29"/>
-          <p:cNvSpPr/>
-          <p:nvPr/>
-        </p:nvSpPr>
-        <p:spPr>
-          <a:xfrm>
-            <a:off x="457200" y="6537960"/>
-            <a:ext cx="4572000" cy="274320"/>
-          </a:xfrm>
-          <a:prstGeom prst="rect">
-            <a:avLst/>
-          </a:prstGeom>
-          <a:noFill/>
-          <a:ln/>
-        </p:spPr>
-        <p:txBody>
-          <a:bodyPr wrap="square" lIns="0" tIns="0" rIns="0" bIns="0" rtlCol="0" anchor="ctr"/>
-          <a:lstStyle/>
-          <a:p>
-            <a:pPr marL="0" indent="0" algn="l">
-              <a:buNone/>
-            </a:pPr>
-            <a:r>
-              <a:rPr lang="en-US" sz="900" dirty="0">
-                <a:solidFill>
-                  <a:srgbClr val="8C8C8C"/>
-                </a:solidFill>
-                <a:latin typeface="Calibri" pitchFamily="34" charset="0"/>
-                <a:ea typeface="Calibri" pitchFamily="34" charset="-122"/>
-                <a:cs typeface="Calibri" pitchFamily="34" charset="-120"/>
-              </a:rPr>
-              <a:t>FitStack — DBMS Zeroth Review</a:t>
-            </a:r>
-            <a:endParaRPr lang="en-US" sz="900" dirty="0"/>
-          </a:p>
-        </p:txBody>
-      </p:sp>
-    </p:spTree>
-  </p:cSld>
-  <p:clrMapOvr>
-    <a:masterClrMapping/>
-  </p:clrMapOvr>
-</p:sld>
-</file>
-
-<file path=ppt/slides/slide11.xml><?xml version="1.0" encoding="utf-8"?>
-<p:sld xmlns:a="http://schemas.openxmlformats.org/drawingml/2006/main" xmlns:r="http://schemas.openxmlformats.org/officeDocument/2006/relationships" xmlns:p="http://schemas.openxmlformats.org/presentationml/2006/main">
-  <p:cSld name="Slide 11">
-    <p:bg>
-      <p:bgPr>
-        <a:solidFill>
-          <a:srgbClr val="FFFFFF"/>
-        </a:solidFill>
-        <a:effectLst/>
-      </p:bgPr>
-    </p:bg>
-    <p:spTree>
-      <p:nvGrpSpPr>
-        <p:cNvPr id="1" name=""/>
-        <p:cNvGrpSpPr/>
-        <p:nvPr/>
-      </p:nvGrpSpPr>
-      <p:grpSpPr>
-        <a:xfrm>
-          <a:off x="0" y="0"/>
-          <a:ext cx="0" cy="0"/>
-          <a:chOff x="0" y="0"/>
-          <a:chExt cx="0" cy="0"/>
-        </a:xfrm>
-      </p:grpSpPr>
-      <p:sp>
-        <p:nvSpPr>
-          <p:cNvPr id="2" name="Text 0"/>
-          <p:cNvSpPr/>
-          <p:nvPr/>
-        </p:nvSpPr>
-        <p:spPr>
-          <a:xfrm>
-            <a:off x="457200" y="320040"/>
-            <a:ext cx="11274552" cy="548640"/>
-          </a:xfrm>
-          <a:prstGeom prst="rect">
-            <a:avLst/>
-          </a:prstGeom>
-          <a:noFill/>
-          <a:ln/>
-        </p:spPr>
-        <p:txBody>
-          <a:bodyPr wrap="square" lIns="0" tIns="0" rIns="0" bIns="0" rtlCol="0" anchor="ctr"/>
-          <a:lstStyle/>
-          <a:p>
-            <a:pPr marL="0" indent="0" algn="l">
-              <a:buNone/>
-            </a:pPr>
-            <a:r>
-              <a:rPr lang="en-US" sz="2800" b="1" dirty="0">
-                <a:solidFill>
-                  <a:srgbClr val="1F3B57"/>
-                </a:solidFill>
-                <a:latin typeface="Cambria" pitchFamily="34" charset="0"/>
-                <a:ea typeface="Cambria" pitchFamily="34" charset="-122"/>
-                <a:cs typeface="Cambria" pitchFamily="34" charset="-120"/>
-              </a:rPr>
-              <a:t>DBMS Concepts Used — Data Integrity</a:t>
-            </a:r>
-            <a:endParaRPr lang="en-US" sz="2800" dirty="0"/>
-          </a:p>
-        </p:txBody>
-      </p:sp>
-      <p:graphicFrame>
-        <p:nvGraphicFramePr>
-          <p:cNvPr id="12" name="Table 0"/>
-          <p:cNvGraphicFramePr>
-            <a:graphicFrameLocks noGrp="1"/>
-          </p:cNvGraphicFramePr>
-          <p:nvPr>
-            <p:extLst>
-              <p:ext uri="{D42A27DB-BD31-4B8C-83A1-F6EECF244321}">
-                <p14:modId xmlns:p14="http://schemas.microsoft.com/office/powerpoint/2010/main" val="1579011935"/>
-              </p:ext>
-            </p:extLst>
-          </p:nvPr>
-        </p:nvGraphicFramePr>
-        <p:xfrm>
-          <a:off x="457200" y="1280160"/>
-          <a:ext cx="11274552" cy="3337560"/>
-        </p:xfrm>
-        <a:graphic>
-          <a:graphicData uri="http://schemas.openxmlformats.org/drawingml/2006/table">
-            <a:tbl>
-              <a:tblPr/>
-              <a:tblGrid>
-                <a:gridCol w="6583680">
-                  <a:extLst>
-                    <a:ext uri="{9D8B030D-6E8A-4147-A177-3AD203B41FA5}">
-                      <a16:colId xmlns:a16="http://schemas.microsoft.com/office/drawing/2014/main" val="20000"/>
-                    </a:ext>
-                  </a:extLst>
-                </a:gridCol>
-                <a:gridCol w="4690872">
-                  <a:extLst>
-                    <a:ext uri="{9D8B030D-6E8A-4147-A177-3AD203B41FA5}">
-                      <a16:colId xmlns:a16="http://schemas.microsoft.com/office/drawing/2014/main" val="20001"/>
-                    </a:ext>
-                  </a:extLst>
-                </a:gridCol>
-              </a:tblGrid>
-              <a:tr h="411480">
-                <a:tc>
-                  <a:txBody>
-                    <a:bodyPr/>
-                    <a:lstStyle/>
-                    <a:p>
-                      <a:pPr marL="0" indent="0">
-                        <a:buNone/>
-                      </a:pPr>
-                      <a:r>
-                        <a:rPr lang="en-US" sz="1250" b="1" dirty="0">
-                          <a:solidFill>
-                            <a:srgbClr val="FFFFFF"/>
-                          </a:solidFill>
-                          <a:latin typeface="Calibri" pitchFamily="34" charset="0"/>
-                          <a:ea typeface="Calibri" pitchFamily="34" charset="-122"/>
-                          <a:cs typeface="Calibri" pitchFamily="34" charset="-120"/>
-                        </a:rPr>
-                        <a:t>Project Function</a:t>
-                      </a:r>
-                      <a:endParaRPr lang="en-US" sz="1250" dirty="0">
-                        <a:latin typeface="Calibri" charset="0"/>
-                        <a:ea typeface="Calibri" charset="0"/>
-                        <a:cs typeface="Calibri" charset="0"/>
-                      </a:endParaRPr>
-                    </a:p>
-                  </a:txBody>
-                  <a:tcPr anchor="ctr">
-                    <a:lnL w="9525" cap="flat" cmpd="sng" algn="ctr">
-                      <a:solidFill>
-                        <a:srgbClr val="BFBFBF"/>
-                      </a:solidFill>
-                      <a:prstDash val="solid"/>
-                      <a:round/>
-                      <a:headEnd type="none" w="med" len="med"/>
-                      <a:tailEnd type="none" w="med" len="med"/>
-                    </a:lnL>
-                    <a:lnR w="9525" cap="flat" cmpd="sng" algn="ctr">
-                      <a:solidFill>
-                        <a:srgbClr val="BFBFBF"/>
-                      </a:solidFill>
-                      <a:prstDash val="solid"/>
-                      <a:round/>
-                      <a:headEnd type="none" w="med" len="med"/>
-                      <a:tailEnd type="none" w="med" len="med"/>
-                    </a:lnR>
-                    <a:lnT w="9525" cap="flat" cmpd="sng" algn="ctr">
-                      <a:solidFill>
-                        <a:srgbClr val="BFBFBF"/>
-                      </a:solidFill>
-                      <a:prstDash val="solid"/>
-                      <a:round/>
-                      <a:headEnd type="none" w="med" len="med"/>
-                      <a:tailEnd type="none" w="med" len="med"/>
-                    </a:lnT>
-                    <a:lnB w="9525" cap="flat" cmpd="sng" algn="ctr">
-                      <a:solidFill>
-                        <a:srgbClr val="BFBFBF"/>
-                      </a:solidFill>
-                      <a:prstDash val="solid"/>
-                      <a:round/>
-                      <a:headEnd type="none" w="med" len="med"/>
-                      <a:tailEnd type="none" w="med" len="med"/>
-                    </a:lnB>
-                    <a:solidFill>
-                      <a:srgbClr val="1F3B57"/>
-                    </a:solidFill>
-                  </a:tcPr>
-                </a:tc>
-                <a:tc>
-                  <a:txBody>
-                    <a:bodyPr/>
-                    <a:lstStyle/>
-                    <a:p>
-                      <a:pPr marL="0" indent="0">
-                        <a:buNone/>
-                      </a:pPr>
-                      <a:r>
-                        <a:rPr lang="en-US" sz="1250" b="1" dirty="0">
-                          <a:solidFill>
-                            <a:srgbClr val="FFFFFF"/>
-                          </a:solidFill>
-                          <a:latin typeface="Calibri" pitchFamily="34" charset="0"/>
-                          <a:ea typeface="Calibri" pitchFamily="34" charset="-122"/>
-                          <a:cs typeface="Calibri" pitchFamily="34" charset="-120"/>
-                        </a:rPr>
-                        <a:t>DBMS Concept</a:t>
-                      </a:r>
-                      <a:endParaRPr lang="en-US" sz="1250" dirty="0">
-                        <a:latin typeface="Calibri" charset="0"/>
-                        <a:ea typeface="Calibri" charset="0"/>
-                        <a:cs typeface="Calibri" charset="0"/>
-                      </a:endParaRPr>
-                    </a:p>
-                  </a:txBody>
-                  <a:tcPr anchor="ctr">
-                    <a:lnL w="9525" cap="flat" cmpd="sng" algn="ctr">
-                      <a:solidFill>
-                        <a:srgbClr val="BFBFBF"/>
-                      </a:solidFill>
-                      <a:prstDash val="solid"/>
-                      <a:round/>
-                      <a:headEnd type="none" w="med" len="med"/>
-                      <a:tailEnd type="none" w="med" len="med"/>
-                    </a:lnL>
-                    <a:lnR w="9525" cap="flat" cmpd="sng" algn="ctr">
-                      <a:solidFill>
-                        <a:srgbClr val="BFBFBF"/>
-                      </a:solidFill>
-                      <a:prstDash val="solid"/>
-                      <a:round/>
-                      <a:headEnd type="none" w="med" len="med"/>
-                      <a:tailEnd type="none" w="med" len="med"/>
-                    </a:lnR>
-                    <a:lnT w="9525" cap="flat" cmpd="sng" algn="ctr">
-                      <a:solidFill>
-                        <a:srgbClr val="BFBFBF"/>
-                      </a:solidFill>
-                      <a:prstDash val="solid"/>
-                      <a:round/>
-                      <a:headEnd type="none" w="med" len="med"/>
-                      <a:tailEnd type="none" w="med" len="med"/>
-                    </a:lnT>
-                    <a:lnB w="9525" cap="flat" cmpd="sng" algn="ctr">
-                      <a:solidFill>
-                        <a:srgbClr val="BFBFBF"/>
-                      </a:solidFill>
-                      <a:prstDash val="solid"/>
-                      <a:round/>
-                      <a:headEnd type="none" w="med" len="med"/>
-                      <a:tailEnd type="none" w="med" len="med"/>
-                    </a:lnB>
-                    <a:solidFill>
-                      <a:srgbClr val="1F3B57"/>
-                    </a:solidFill>
-                  </a:tcPr>
-                </a:tc>
-                <a:extLst>
-                  <a:ext uri="{0D108BD9-81ED-4DB2-BD59-A6C34878D82A}">
-                    <a16:rowId xmlns:a16="http://schemas.microsoft.com/office/drawing/2014/main" val="10000"/>
-                  </a:ext>
-                </a:extLst>
-              </a:tr>
-              <a:tr h="548640">
-                <a:tc>
-                  <a:txBody>
-                    <a:bodyPr/>
-                    <a:lstStyle/>
-                    <a:p>
-                      <a:pPr marL="0" indent="0">
-                        <a:buNone/>
-                      </a:pPr>
-                      <a:r>
-                        <a:rPr lang="en-US" sz="1250" dirty="0">
-                          <a:solidFill>
-                            <a:srgbClr val="262626"/>
-                          </a:solidFill>
-                          <a:latin typeface="Calibri" pitchFamily="34" charset="0"/>
-                          <a:ea typeface="Calibri" pitchFamily="34" charset="-122"/>
-                          <a:cs typeface="Calibri" pitchFamily="34" charset="-120"/>
-                        </a:rPr>
-                        <a:t>Linking every child table back to its owner</a:t>
-                      </a:r>
-                      <a:endParaRPr lang="en-US" sz="1250" dirty="0">
-                        <a:latin typeface="Calibri" charset="0"/>
-                        <a:ea typeface="Calibri" charset="0"/>
-                        <a:cs typeface="Calibri" charset="0"/>
-                      </a:endParaRPr>
-                    </a:p>
-                  </a:txBody>
-                  <a:tcPr anchor="ctr">
-                    <a:lnL w="9525" cap="flat" cmpd="sng" algn="ctr">
-                      <a:solidFill>
-                        <a:srgbClr val="BFBFBF"/>
-                      </a:solidFill>
-                      <a:prstDash val="solid"/>
-                      <a:round/>
-                      <a:headEnd type="none" w="med" len="med"/>
-                      <a:tailEnd type="none" w="med" len="med"/>
-                    </a:lnL>
-                    <a:lnR w="9525" cap="flat" cmpd="sng" algn="ctr">
-                      <a:solidFill>
-                        <a:srgbClr val="BFBFBF"/>
-                      </a:solidFill>
-                      <a:prstDash val="solid"/>
-                      <a:round/>
-                      <a:headEnd type="none" w="med" len="med"/>
-                      <a:tailEnd type="none" w="med" len="med"/>
-                    </a:lnR>
-                    <a:lnT w="9525" cap="flat" cmpd="sng" algn="ctr">
-                      <a:solidFill>
-                        <a:srgbClr val="BFBFBF"/>
-                      </a:solidFill>
-                      <a:prstDash val="solid"/>
-                      <a:round/>
-                      <a:headEnd type="none" w="med" len="med"/>
-                      <a:tailEnd type="none" w="med" len="med"/>
-                    </a:lnT>
-                    <a:lnB w="9525" cap="flat" cmpd="sng" algn="ctr">
-                      <a:solidFill>
-                        <a:srgbClr val="BFBFBF"/>
-                      </a:solidFill>
-                      <a:prstDash val="solid"/>
-                      <a:round/>
-                      <a:headEnd type="none" w="med" len="med"/>
-                      <a:tailEnd type="none" w="med" len="med"/>
-                    </a:lnB>
-                  </a:tcPr>
-                </a:tc>
-                <a:tc>
-                  <a:txBody>
-                    <a:bodyPr/>
-                    <a:lstStyle/>
-                    <a:p>
-                      <a:pPr marL="0" indent="0">
-                        <a:buNone/>
-                      </a:pPr>
-                      <a:r>
-                        <a:rPr lang="en-US" sz="1250" dirty="0">
-                          <a:solidFill>
-                            <a:srgbClr val="262626"/>
-                          </a:solidFill>
-                          <a:latin typeface="Calibri" pitchFamily="34" charset="0"/>
-                          <a:ea typeface="Calibri" pitchFamily="34" charset="-122"/>
-                          <a:cs typeface="Calibri" pitchFamily="34" charset="-120"/>
-                        </a:rPr>
-                        <a:t>Primary Key / Foreign Key, referential integrity</a:t>
-                      </a:r>
-                      <a:endParaRPr lang="en-US" sz="1250" dirty="0">
-                        <a:latin typeface="Calibri" charset="0"/>
-                        <a:ea typeface="Calibri" charset="0"/>
-                        <a:cs typeface="Calibri" charset="0"/>
-                      </a:endParaRPr>
-                    </a:p>
-                  </a:txBody>
-                  <a:tcPr anchor="ctr">
-                    <a:lnL w="9525" cap="flat" cmpd="sng" algn="ctr">
-                      <a:solidFill>
-                        <a:srgbClr val="BFBFBF"/>
-                      </a:solidFill>
-                      <a:prstDash val="solid"/>
-                      <a:round/>
-                      <a:headEnd type="none" w="med" len="med"/>
-                      <a:tailEnd type="none" w="med" len="med"/>
-                    </a:lnL>
-                    <a:lnR w="9525" cap="flat" cmpd="sng" algn="ctr">
-                      <a:solidFill>
-                        <a:srgbClr val="BFBFBF"/>
-                      </a:solidFill>
-                      <a:prstDash val="solid"/>
-                      <a:round/>
-                      <a:headEnd type="none" w="med" len="med"/>
-                      <a:tailEnd type="none" w="med" len="med"/>
-                    </a:lnR>
-                    <a:lnT w="9525" cap="flat" cmpd="sng" algn="ctr">
-                      <a:solidFill>
-                        <a:srgbClr val="BFBFBF"/>
-                      </a:solidFill>
-                      <a:prstDash val="solid"/>
-                      <a:round/>
-                      <a:headEnd type="none" w="med" len="med"/>
-                      <a:tailEnd type="none" w="med" len="med"/>
-                    </a:lnT>
-                    <a:lnB w="9525" cap="flat" cmpd="sng" algn="ctr">
-                      <a:solidFill>
-                        <a:srgbClr val="BFBFBF"/>
-                      </a:solidFill>
-                      <a:prstDash val="solid"/>
-                      <a:round/>
-                      <a:headEnd type="none" w="med" len="med"/>
-                      <a:tailEnd type="none" w="med" len="med"/>
-                    </a:lnB>
-                  </a:tcPr>
-                </a:tc>
-                <a:extLst>
-                  <a:ext uri="{0D108BD9-81ED-4DB2-BD59-A6C34878D82A}">
-                    <a16:rowId xmlns:a16="http://schemas.microsoft.com/office/drawing/2014/main" val="10001"/>
-                  </a:ext>
-                </a:extLst>
-              </a:tr>
-              <a:tr h="685800">
-                <a:tc>
-                  <a:txBody>
-                    <a:bodyPr/>
-                    <a:lstStyle/>
-                    <a:p>
-                      <a:pPr marL="0" indent="0">
-                        <a:buNone/>
-                      </a:pPr>
-                      <a:r>
-                        <a:rPr lang="en-US" sz="1250" dirty="0">
-                          <a:solidFill>
-                            <a:srgbClr val="262626"/>
-                          </a:solidFill>
-                          <a:latin typeface="Calibri" pitchFamily="34" charset="0"/>
-                          <a:ea typeface="Calibri" pitchFamily="34" charset="-122"/>
-                          <a:cs typeface="Calibri" pitchFamily="34" charset="-120"/>
-                        </a:rPr>
-                        <a:t>Deleting a session removes its sets; deleting a routine detaches (not deletes) past sessions</a:t>
-                      </a:r>
-                      <a:endParaRPr lang="en-US" sz="1250" dirty="0">
-                        <a:latin typeface="Calibri" charset="0"/>
-                        <a:ea typeface="Calibri" charset="0"/>
-                        <a:cs typeface="Calibri" charset="0"/>
-                      </a:endParaRPr>
-                    </a:p>
-                  </a:txBody>
-                  <a:tcPr anchor="ctr">
-                    <a:lnL w="9525" cap="flat" cmpd="sng" algn="ctr">
-                      <a:solidFill>
-                        <a:srgbClr val="BFBFBF"/>
-                      </a:solidFill>
-                      <a:prstDash val="solid"/>
-                      <a:round/>
-                      <a:headEnd type="none" w="med" len="med"/>
-                      <a:tailEnd type="none" w="med" len="med"/>
-                    </a:lnL>
-                    <a:lnR w="9525" cap="flat" cmpd="sng" algn="ctr">
-                      <a:solidFill>
-                        <a:srgbClr val="BFBFBF"/>
-                      </a:solidFill>
-                      <a:prstDash val="solid"/>
-                      <a:round/>
-                      <a:headEnd type="none" w="med" len="med"/>
-                      <a:tailEnd type="none" w="med" len="med"/>
-                    </a:lnR>
-                    <a:lnT w="9525" cap="flat" cmpd="sng" algn="ctr">
-                      <a:solidFill>
-                        <a:srgbClr val="BFBFBF"/>
-                      </a:solidFill>
-                      <a:prstDash val="solid"/>
-                      <a:round/>
-                      <a:headEnd type="none" w="med" len="med"/>
-                      <a:tailEnd type="none" w="med" len="med"/>
-                    </a:lnT>
-                    <a:lnB w="9525" cap="flat" cmpd="sng" algn="ctr">
-                      <a:solidFill>
-                        <a:srgbClr val="BFBFBF"/>
-                      </a:solidFill>
-                      <a:prstDash val="solid"/>
-                      <a:round/>
-                      <a:headEnd type="none" w="med" len="med"/>
-                      <a:tailEnd type="none" w="med" len="med"/>
-                    </a:lnB>
-                  </a:tcPr>
-                </a:tc>
-                <a:tc>
-                  <a:txBody>
-                    <a:bodyPr/>
-                    <a:lstStyle/>
-                    <a:p>
-                      <a:pPr marL="0" indent="0">
-                        <a:buNone/>
-                      </a:pPr>
-                      <a:r>
-                        <a:rPr lang="en-US" sz="1250" dirty="0">
-                          <a:solidFill>
-                            <a:srgbClr val="262626"/>
-                          </a:solidFill>
-                          <a:latin typeface="Calibri" pitchFamily="34" charset="0"/>
-                          <a:ea typeface="Calibri" pitchFamily="34" charset="-122"/>
-                          <a:cs typeface="Calibri" pitchFamily="34" charset="-120"/>
-                        </a:rPr>
-                        <a:t>ON DELETE CASCADE / ON DELETE SET NULL</a:t>
-                      </a:r>
-                      <a:endParaRPr lang="en-US" sz="1250" dirty="0">
-                        <a:latin typeface="Calibri" charset="0"/>
-                        <a:ea typeface="Calibri" charset="0"/>
-                        <a:cs typeface="Calibri" charset="0"/>
-                      </a:endParaRPr>
-                    </a:p>
-                  </a:txBody>
-                  <a:tcPr anchor="ctr">
-                    <a:lnL w="9525" cap="flat" cmpd="sng" algn="ctr">
-                      <a:solidFill>
-                        <a:srgbClr val="BFBFBF"/>
-                      </a:solidFill>
-                      <a:prstDash val="solid"/>
-                      <a:round/>
-                      <a:headEnd type="none" w="med" len="med"/>
-                      <a:tailEnd type="none" w="med" len="med"/>
-                    </a:lnL>
-                    <a:lnR w="9525" cap="flat" cmpd="sng" algn="ctr">
-                      <a:solidFill>
-                        <a:srgbClr val="BFBFBF"/>
-                      </a:solidFill>
-                      <a:prstDash val="solid"/>
-                      <a:round/>
-                      <a:headEnd type="none" w="med" len="med"/>
-                      <a:tailEnd type="none" w="med" len="med"/>
-                    </a:lnR>
-                    <a:lnT w="9525" cap="flat" cmpd="sng" algn="ctr">
-                      <a:solidFill>
-                        <a:srgbClr val="BFBFBF"/>
-                      </a:solidFill>
-                      <a:prstDash val="solid"/>
-                      <a:round/>
-                      <a:headEnd type="none" w="med" len="med"/>
-                      <a:tailEnd type="none" w="med" len="med"/>
-                    </a:lnT>
-                    <a:lnB w="9525" cap="flat" cmpd="sng" algn="ctr">
-                      <a:solidFill>
-                        <a:srgbClr val="BFBFBF"/>
-                      </a:solidFill>
-                      <a:prstDash val="solid"/>
-                      <a:round/>
-                      <a:headEnd type="none" w="med" len="med"/>
-                      <a:tailEnd type="none" w="med" len="med"/>
-                    </a:lnB>
-                  </a:tcPr>
-                </a:tc>
-                <a:extLst>
-                  <a:ext uri="{0D108BD9-81ED-4DB2-BD59-A6C34878D82A}">
-                    <a16:rowId xmlns:a16="http://schemas.microsoft.com/office/drawing/2014/main" val="10002"/>
-                  </a:ext>
-                </a:extLst>
-              </a:tr>
-              <a:tr h="594360">
-                <a:tc>
-                  <a:txBody>
-                    <a:bodyPr/>
-                    <a:lstStyle/>
-                    <a:p>
-                      <a:pPr marL="0" indent="0">
-                        <a:buNone/>
-                      </a:pPr>
-                      <a:r>
-                        <a:rPr lang="en-US" sz="1250" dirty="0">
-                          <a:solidFill>
-                            <a:srgbClr val="262626"/>
-                          </a:solidFill>
-                          <a:latin typeface="Calibri" pitchFamily="34" charset="0"/>
-                          <a:ea typeface="Calibri" pitchFamily="34" charset="-122"/>
-                          <a:cs typeface="Calibri" pitchFamily="34" charset="-120"/>
-                        </a:rPr>
-                        <a:t>Goal restricted to bulk/cut/maintain; onboarding fields required together</a:t>
-                      </a:r>
-                      <a:endParaRPr lang="en-US" sz="1250" dirty="0">
-                        <a:latin typeface="Calibri" charset="0"/>
-                        <a:ea typeface="Calibri" charset="0"/>
-                        <a:cs typeface="Calibri" charset="0"/>
-                      </a:endParaRPr>
-                    </a:p>
-                  </a:txBody>
-                  <a:tcPr anchor="ctr">
-                    <a:lnL w="9525" cap="flat" cmpd="sng" algn="ctr">
-                      <a:solidFill>
-                        <a:srgbClr val="BFBFBF"/>
-                      </a:solidFill>
-                      <a:prstDash val="solid"/>
-                      <a:round/>
-                      <a:headEnd type="none" w="med" len="med"/>
-                      <a:tailEnd type="none" w="med" len="med"/>
-                    </a:lnL>
-                    <a:lnR w="9525" cap="flat" cmpd="sng" algn="ctr">
-                      <a:solidFill>
-                        <a:srgbClr val="BFBFBF"/>
-                      </a:solidFill>
-                      <a:prstDash val="solid"/>
-                      <a:round/>
-                      <a:headEnd type="none" w="med" len="med"/>
-                      <a:tailEnd type="none" w="med" len="med"/>
-                    </a:lnR>
-                    <a:lnT w="9525" cap="flat" cmpd="sng" algn="ctr">
-                      <a:solidFill>
-                        <a:srgbClr val="BFBFBF"/>
-                      </a:solidFill>
-                      <a:prstDash val="solid"/>
-                      <a:round/>
-                      <a:headEnd type="none" w="med" len="med"/>
-                      <a:tailEnd type="none" w="med" len="med"/>
-                    </a:lnT>
-                    <a:lnB w="9525" cap="flat" cmpd="sng" algn="ctr">
-                      <a:solidFill>
-                        <a:srgbClr val="BFBFBF"/>
-                      </a:solidFill>
-                      <a:prstDash val="solid"/>
-                      <a:round/>
-                      <a:headEnd type="none" w="med" len="med"/>
-                      <a:tailEnd type="none" w="med" len="med"/>
-                    </a:lnB>
-                  </a:tcPr>
-                </a:tc>
-                <a:tc>
-                  <a:txBody>
-                    <a:bodyPr/>
-                    <a:lstStyle/>
-                    <a:p>
-                      <a:pPr marL="0" indent="0">
-                        <a:buNone/>
-                      </a:pPr>
-                      <a:r>
-                        <a:rPr lang="en-US" sz="1250" dirty="0">
-                          <a:solidFill>
-                            <a:srgbClr val="262626"/>
-                          </a:solidFill>
-                          <a:latin typeface="Calibri" pitchFamily="34" charset="0"/>
-                          <a:ea typeface="Calibri" pitchFamily="34" charset="-122"/>
-                          <a:cs typeface="Calibri" pitchFamily="34" charset="-120"/>
-                        </a:rPr>
-                        <a:t>CHECK constraints</a:t>
-                      </a:r>
-                      <a:endParaRPr lang="en-US" sz="1250" dirty="0">
-                        <a:latin typeface="Calibri" charset="0"/>
-                        <a:ea typeface="Calibri" charset="0"/>
-                        <a:cs typeface="Calibri" charset="0"/>
-                      </a:endParaRPr>
-                    </a:p>
-                  </a:txBody>
-                  <a:tcPr anchor="ctr">
-                    <a:lnL w="9525" cap="flat" cmpd="sng" algn="ctr">
-                      <a:solidFill>
-                        <a:srgbClr val="BFBFBF"/>
-                      </a:solidFill>
-                      <a:prstDash val="solid"/>
-                      <a:round/>
-                      <a:headEnd type="none" w="med" len="med"/>
-                      <a:tailEnd type="none" w="med" len="med"/>
-                    </a:lnL>
-                    <a:lnR w="9525" cap="flat" cmpd="sng" algn="ctr">
-                      <a:solidFill>
-                        <a:srgbClr val="BFBFBF"/>
-                      </a:solidFill>
-                      <a:prstDash val="solid"/>
-                      <a:round/>
-                      <a:headEnd type="none" w="med" len="med"/>
-                      <a:tailEnd type="none" w="med" len="med"/>
-                    </a:lnR>
-                    <a:lnT w="9525" cap="flat" cmpd="sng" algn="ctr">
-                      <a:solidFill>
-                        <a:srgbClr val="BFBFBF"/>
-                      </a:solidFill>
-                      <a:prstDash val="solid"/>
-                      <a:round/>
-                      <a:headEnd type="none" w="med" len="med"/>
-                      <a:tailEnd type="none" w="med" len="med"/>
-                    </a:lnT>
-                    <a:lnB w="9525" cap="flat" cmpd="sng" algn="ctr">
-                      <a:solidFill>
-                        <a:srgbClr val="BFBFBF"/>
-                      </a:solidFill>
-                      <a:prstDash val="solid"/>
-                      <a:round/>
-                      <a:headEnd type="none" w="med" len="med"/>
-                      <a:tailEnd type="none" w="med" len="med"/>
-                    </a:lnB>
-                  </a:tcPr>
-                </a:tc>
-                <a:extLst>
-                  <a:ext uri="{0D108BD9-81ED-4DB2-BD59-A6C34878D82A}">
-                    <a16:rowId xmlns:a16="http://schemas.microsoft.com/office/drawing/2014/main" val="10003"/>
-                  </a:ext>
-                </a:extLst>
-              </a:tr>
-              <a:tr h="502920">
-                <a:tc>
-                  <a:txBody>
-                    <a:bodyPr/>
-                    <a:lstStyle/>
-                    <a:p>
-                      <a:pPr marL="0" indent="0">
-                        <a:buNone/>
-                      </a:pPr>
-                      <a:r>
-                        <a:rPr lang="en-US" sz="1250" dirty="0">
-                          <a:solidFill>
-                            <a:srgbClr val="262626"/>
-                          </a:solidFill>
-                          <a:latin typeface="Calibri" pitchFamily="34" charset="0"/>
-                          <a:ea typeface="Calibri" pitchFamily="34" charset="-122"/>
-                          <a:cs typeface="Calibri" pitchFamily="34" charset="-120"/>
-                        </a:rPr>
-                        <a:t>One weigh-in per user per day</a:t>
-                      </a:r>
-                      <a:endParaRPr lang="en-US" sz="1250" dirty="0">
-                        <a:latin typeface="Calibri" charset="0"/>
-                        <a:ea typeface="Calibri" charset="0"/>
-                        <a:cs typeface="Calibri" charset="0"/>
-                      </a:endParaRPr>
-                    </a:p>
-                  </a:txBody>
-                  <a:tcPr anchor="ctr">
-                    <a:lnL w="9525" cap="flat" cmpd="sng" algn="ctr">
-                      <a:solidFill>
-                        <a:srgbClr val="BFBFBF"/>
-                      </a:solidFill>
-                      <a:prstDash val="solid"/>
-                      <a:round/>
-                      <a:headEnd type="none" w="med" len="med"/>
-                      <a:tailEnd type="none" w="med" len="med"/>
-                    </a:lnL>
-                    <a:lnR w="9525" cap="flat" cmpd="sng" algn="ctr">
-                      <a:solidFill>
-                        <a:srgbClr val="BFBFBF"/>
-                      </a:solidFill>
-                      <a:prstDash val="solid"/>
-                      <a:round/>
-                      <a:headEnd type="none" w="med" len="med"/>
-                      <a:tailEnd type="none" w="med" len="med"/>
-                    </a:lnR>
-                    <a:lnT w="9525" cap="flat" cmpd="sng" algn="ctr">
-                      <a:solidFill>
-                        <a:srgbClr val="BFBFBF"/>
-                      </a:solidFill>
-                      <a:prstDash val="solid"/>
-                      <a:round/>
-                      <a:headEnd type="none" w="med" len="med"/>
-                      <a:tailEnd type="none" w="med" len="med"/>
-                    </a:lnT>
-                    <a:lnB w="9525" cap="flat" cmpd="sng" algn="ctr">
-                      <a:solidFill>
-                        <a:srgbClr val="BFBFBF"/>
-                      </a:solidFill>
-                      <a:prstDash val="solid"/>
-                      <a:round/>
-                      <a:headEnd type="none" w="med" len="med"/>
-                      <a:tailEnd type="none" w="med" len="med"/>
-                    </a:lnB>
-                  </a:tcPr>
-                </a:tc>
-                <a:tc>
-                  <a:txBody>
-                    <a:bodyPr/>
-                    <a:lstStyle/>
-                    <a:p>
-                      <a:pPr marL="0" indent="0">
-                        <a:buNone/>
-                      </a:pPr>
-                      <a:r>
-                        <a:rPr lang="en-US" sz="1250" dirty="0">
-                          <a:solidFill>
-                            <a:srgbClr val="262626"/>
-                          </a:solidFill>
-                          <a:latin typeface="Calibri" pitchFamily="34" charset="0"/>
-                          <a:ea typeface="Calibri" pitchFamily="34" charset="-122"/>
-                          <a:cs typeface="Calibri" pitchFamily="34" charset="-120"/>
-                        </a:rPr>
-                        <a:t>UNIQUE constraint</a:t>
-                      </a:r>
-                      <a:endParaRPr lang="en-US" sz="1250" dirty="0">
-                        <a:latin typeface="Calibri" charset="0"/>
-                        <a:ea typeface="Calibri" charset="0"/>
-                        <a:cs typeface="Calibri" charset="0"/>
-                      </a:endParaRPr>
-                    </a:p>
-                  </a:txBody>
-                  <a:tcPr anchor="ctr">
-                    <a:lnL w="9525" cap="flat" cmpd="sng" algn="ctr">
-                      <a:solidFill>
-                        <a:srgbClr val="BFBFBF"/>
-                      </a:solidFill>
-                      <a:prstDash val="solid"/>
-                      <a:round/>
-                      <a:headEnd type="none" w="med" len="med"/>
-                      <a:tailEnd type="none" w="med" len="med"/>
-                    </a:lnL>
-                    <a:lnR w="9525" cap="flat" cmpd="sng" algn="ctr">
-                      <a:solidFill>
-                        <a:srgbClr val="BFBFBF"/>
-                      </a:solidFill>
-                      <a:prstDash val="solid"/>
-                      <a:round/>
-                      <a:headEnd type="none" w="med" len="med"/>
-                      <a:tailEnd type="none" w="med" len="med"/>
-                    </a:lnR>
-                    <a:lnT w="9525" cap="flat" cmpd="sng" algn="ctr">
-                      <a:solidFill>
-                        <a:srgbClr val="BFBFBF"/>
-                      </a:solidFill>
-                      <a:prstDash val="solid"/>
-                      <a:round/>
-                      <a:headEnd type="none" w="med" len="med"/>
-                      <a:tailEnd type="none" w="med" len="med"/>
-                    </a:lnT>
-                    <a:lnB w="9525" cap="flat" cmpd="sng" algn="ctr">
-                      <a:solidFill>
-                        <a:srgbClr val="BFBFBF"/>
-                      </a:solidFill>
-                      <a:prstDash val="solid"/>
-                      <a:round/>
-                      <a:headEnd type="none" w="med" len="med"/>
-                      <a:tailEnd type="none" w="med" len="med"/>
-                    </a:lnB>
-                  </a:tcPr>
-                </a:tc>
-                <a:extLst>
-                  <a:ext uri="{0D108BD9-81ED-4DB2-BD59-A6C34878D82A}">
-                    <a16:rowId xmlns:a16="http://schemas.microsoft.com/office/drawing/2014/main" val="10004"/>
-                  </a:ext>
-                </a:extLst>
-              </a:tr>
-              <a:tr h="594360">
-                <a:tc>
-                  <a:txBody>
-                    <a:bodyPr/>
-                    <a:lstStyle/>
-                    <a:p>
-                      <a:pPr marL="0" indent="0">
-                        <a:buNone/>
-                      </a:pPr>
-                      <a:r>
-                        <a:rPr lang="en-US" sz="1250" dirty="0">
-                          <a:solidFill>
-                            <a:srgbClr val="262626"/>
-                          </a:solidFill>
-                          <a:latin typeface="Calibri" pitchFamily="34" charset="0"/>
-                          <a:ea typeface="Calibri" pitchFamily="34" charset="-122"/>
-                          <a:cs typeface="Calibri" pitchFamily="34" charset="-120"/>
-                        </a:rPr>
-                        <a:t>food_logs stores a food_id + quantity, not duplicated macro data</a:t>
-                      </a:r>
-                      <a:endParaRPr lang="en-US" sz="1250" dirty="0">
-                        <a:latin typeface="Calibri" charset="0"/>
-                        <a:ea typeface="Calibri" charset="0"/>
-                        <a:cs typeface="Calibri" charset="0"/>
-                      </a:endParaRPr>
-                    </a:p>
-                  </a:txBody>
-                  <a:tcPr anchor="ctr">
-                    <a:lnL w="9525" cap="flat" cmpd="sng" algn="ctr">
-                      <a:solidFill>
-                        <a:srgbClr val="BFBFBF"/>
-                      </a:solidFill>
-                      <a:prstDash val="solid"/>
-                      <a:round/>
-                      <a:headEnd type="none" w="med" len="med"/>
-                      <a:tailEnd type="none" w="med" len="med"/>
-                    </a:lnL>
-                    <a:lnR w="9525" cap="flat" cmpd="sng" algn="ctr">
-                      <a:solidFill>
-                        <a:srgbClr val="BFBFBF"/>
-                      </a:solidFill>
-                      <a:prstDash val="solid"/>
-                      <a:round/>
-                      <a:headEnd type="none" w="med" len="med"/>
-                      <a:tailEnd type="none" w="med" len="med"/>
-                    </a:lnR>
-                    <a:lnT w="9525" cap="flat" cmpd="sng" algn="ctr">
-                      <a:solidFill>
-                        <a:srgbClr val="BFBFBF"/>
-                      </a:solidFill>
-                      <a:prstDash val="solid"/>
-                      <a:round/>
-                      <a:headEnd type="none" w="med" len="med"/>
-                      <a:tailEnd type="none" w="med" len="med"/>
-                    </a:lnT>
-                    <a:lnB w="9525" cap="flat" cmpd="sng" algn="ctr">
-                      <a:solidFill>
-                        <a:srgbClr val="BFBFBF"/>
-                      </a:solidFill>
-                      <a:prstDash val="solid"/>
-                      <a:round/>
-                      <a:headEnd type="none" w="med" len="med"/>
-                      <a:tailEnd type="none" w="med" len="med"/>
-                    </a:lnB>
-                  </a:tcPr>
-                </a:tc>
-                <a:tc>
-                  <a:txBody>
-                    <a:bodyPr/>
-                    <a:lstStyle/>
-                    <a:p>
-                      <a:pPr marL="0" indent="0">
-                        <a:buNone/>
-                      </a:pPr>
-                      <a:r>
-                        <a:rPr lang="en-US" sz="1250" dirty="0">
-                          <a:solidFill>
-                            <a:srgbClr val="262626"/>
-                          </a:solidFill>
-                          <a:latin typeface="Calibri" pitchFamily="34" charset="0"/>
-                          <a:ea typeface="Calibri" pitchFamily="34" charset="-122"/>
-                          <a:cs typeface="Calibri" pitchFamily="34" charset="-120"/>
-                        </a:rPr>
-                        <a:t>Normalization (3NF)</a:t>
-                      </a:r>
-                      <a:endParaRPr lang="en-US" sz="1250" dirty="0">
-                        <a:latin typeface="Calibri" charset="0"/>
-                        <a:ea typeface="Calibri" charset="0"/>
-                        <a:cs typeface="Calibri" charset="0"/>
-                      </a:endParaRPr>
-                    </a:p>
-                  </a:txBody>
-                  <a:tcPr anchor="ctr">
-                    <a:lnL w="9525" cap="flat" cmpd="sng" algn="ctr">
-                      <a:solidFill>
-                        <a:srgbClr val="BFBFBF"/>
-                      </a:solidFill>
-                      <a:prstDash val="solid"/>
-                      <a:round/>
-                      <a:headEnd type="none" w="med" len="med"/>
-                      <a:tailEnd type="none" w="med" len="med"/>
-                    </a:lnL>
-                    <a:lnR w="9525" cap="flat" cmpd="sng" algn="ctr">
-                      <a:solidFill>
-                        <a:srgbClr val="BFBFBF"/>
-                      </a:solidFill>
-                      <a:prstDash val="solid"/>
-                      <a:round/>
-                      <a:headEnd type="none" w="med" len="med"/>
-                      <a:tailEnd type="none" w="med" len="med"/>
-                    </a:lnR>
-                    <a:lnT w="9525" cap="flat" cmpd="sng" algn="ctr">
-                      <a:solidFill>
-                        <a:srgbClr val="BFBFBF"/>
-                      </a:solidFill>
-                      <a:prstDash val="solid"/>
-                      <a:round/>
-                      <a:headEnd type="none" w="med" len="med"/>
-                      <a:tailEnd type="none" w="med" len="med"/>
-                    </a:lnT>
-                    <a:lnB w="9525" cap="flat" cmpd="sng" algn="ctr">
-                      <a:solidFill>
-                        <a:srgbClr val="BFBFBF"/>
-                      </a:solidFill>
-                      <a:prstDash val="solid"/>
-                      <a:round/>
-                      <a:headEnd type="none" w="med" len="med"/>
-                      <a:tailEnd type="none" w="med" len="med"/>
-                    </a:lnB>
-                  </a:tcPr>
-                </a:tc>
-                <a:extLst>
-                  <a:ext uri="{0D108BD9-81ED-4DB2-BD59-A6C34878D82A}">
-                    <a16:rowId xmlns:a16="http://schemas.microsoft.com/office/drawing/2014/main" val="10005"/>
-                  </a:ext>
-                </a:extLst>
-              </a:tr>
-            </a:tbl>
-          </a:graphicData>
-        </a:graphic>
-      </p:graphicFrame>
-      <p:sp>
-        <p:nvSpPr>
-          <p:cNvPr id="4" name="Text 1"/>
-          <p:cNvSpPr/>
-          <p:nvPr/>
-        </p:nvSpPr>
-        <p:spPr>
-          <a:xfrm>
-            <a:off x="11612880" y="6537960"/>
-            <a:ext cx="457200" cy="274320"/>
-          </a:xfrm>
-          <a:prstGeom prst="rect">
-            <a:avLst/>
-          </a:prstGeom>
-          <a:noFill/>
-          <a:ln/>
-        </p:spPr>
-        <p:txBody>
-          <a:bodyPr wrap="square" lIns="0" tIns="0" rIns="0" bIns="0" rtlCol="0" anchor="ctr"/>
-          <a:lstStyle/>
-          <a:p>
-            <a:pPr marL="0" indent="0" algn="r">
-              <a:buNone/>
-            </a:pPr>
-            <a:r>
-              <a:rPr lang="en-US" sz="1000" dirty="0">
-                <a:solidFill>
-                  <a:srgbClr val="8C8C8C"/>
-                </a:solidFill>
-                <a:latin typeface="Calibri" pitchFamily="34" charset="0"/>
-                <a:ea typeface="Calibri" pitchFamily="34" charset="-122"/>
-                <a:cs typeface="Calibri" pitchFamily="34" charset="-120"/>
-              </a:rPr>
-              <a:t>11</a:t>
-            </a:r>
-            <a:endParaRPr lang="en-US" sz="1000" dirty="0"/>
-          </a:p>
-        </p:txBody>
-      </p:sp>
-      <p:sp>
-        <p:nvSpPr>
-          <p:cNvPr id="5" name="Text 2"/>
           <p:cNvSpPr/>
           <p:nvPr/>
         </p:nvSpPr>
@@ -4635,7 +4463,7 @@
           <p:nvPr>
             <p:extLst>
               <p:ext uri="{D42A27DB-BD31-4B8C-83A1-F6EECF244321}">
-                <p14:modId xmlns:p14="http://schemas.microsoft.com/office/powerpoint/2010/main" val="1579011935"/>
+                <p14:modId xmlns:p14="http://schemas.microsoft.com/office/powerpoint/2010/main" val="851409547"/>
               </p:ext>
             </p:extLst>
           </p:nvPr>
@@ -5638,17 +5466,6 @@
                       <a:pPr marL="0" indent="0">
                         <a:buNone/>
                       </a:pPr>
-                      <a:r>
-                        <a:rPr lang="en-US" sz="1080" dirty="0">
-                          <a:solidFill>
-                            <a:srgbClr val="262626"/>
-                          </a:solidFill>
-                          <a:latin typeface="Calibri" pitchFamily="34" charset="0"/>
-                          <a:ea typeface="Calibri" pitchFamily="34" charset="-122"/>
-                          <a:cs typeface="Calibri" pitchFamily="34" charset="-120"/>
-                        </a:rPr>
-                        <a:t>Each individual INSERT / UPDATE / DELETE</a:t>
-                      </a:r>
                       <a:endParaRPr lang="en-US" sz="1080" dirty="0">
                         <a:latin typeface="Calibri" charset="0"/>
                         <a:ea typeface="Calibri" charset="0"/>
@@ -5703,17 +5520,6 @@
                       <a:pPr marL="0" indent="0">
                         <a:buNone/>
                       </a:pPr>
-                      <a:r>
-                        <a:rPr lang="en-US" sz="1080" dirty="0">
-                          <a:solidFill>
-                            <a:srgbClr val="262626"/>
-                          </a:solidFill>
-                          <a:latin typeface="Calibri" pitchFamily="34" charset="0"/>
-                          <a:ea typeface="Calibri" pitchFamily="34" charset="-122"/>
-                          <a:cs typeface="Calibri" pitchFamily="34" charset="-120"/>
-                        </a:rPr>
-                        <a:t>Statement-level atomicity (Postgres). No multi-statement app transaction yet — an honest scope gap, planned for Review 2</a:t>
-                      </a:r>
                       <a:endParaRPr lang="en-US" sz="1080" dirty="0">
                         <a:latin typeface="Calibri" charset="0"/>
                         <a:ea typeface="Calibri" charset="0"/>
@@ -7317,75 +7123,19 @@
                 <a:ea typeface="Calibri" pitchFamily="34" charset="-122"/>
                 <a:cs typeface="Calibri" pitchFamily="34" charset="-120"/>
               </a:rPr>
-              <a:t>Authentication (signup, login, session persistence) on Supabase Auth, with a working manual-approval access gate.</a:t>
-            </a:r>
-            <a:endParaRPr lang="en-US" sz="1250" dirty="0"/>
-          </a:p>
-        </p:txBody>
-      </p:sp>
-      <p:sp>
-        <p:nvSpPr>
-          <p:cNvPr id="10" name="Text 8"/>
-          <p:cNvSpPr/>
-          <p:nvPr/>
-        </p:nvSpPr>
-        <p:spPr>
-          <a:xfrm>
-            <a:off x="640080" y="3639312"/>
-            <a:ext cx="228600" cy="457200"/>
-          </a:xfrm>
-          <a:prstGeom prst="rect">
-            <a:avLst/>
-          </a:prstGeom>
-          <a:noFill/>
-          <a:ln/>
-        </p:spPr>
-        <p:txBody>
-          <a:bodyPr wrap="square" lIns="25400" tIns="25400" rIns="25400" bIns="25400" rtlCol="0" anchor="t"/>
-          <a:lstStyle/>
-          <a:p>
-            <a:pPr marL="0" indent="0" algn="l">
-              <a:buNone/>
-            </a:pPr>
-            <a:r>
-              <a:rPr lang="en-US" sz="1300" b="1" dirty="0">
-                <a:solidFill>
-                  <a:srgbClr val="1F3B57"/>
+              <a:t>Authentication (signup, login, session persistence) on Supabase Auth, with a working </a:t>
+            </a:r>
+            <a:r>
+              <a:rPr lang="en-US" b="1" dirty="0">
+                <a:solidFill>
+                  <a:srgbClr val="262626"/>
                 </a:solidFill>
                 <a:latin typeface="Calibri" pitchFamily="34" charset="0"/>
                 <a:ea typeface="Calibri" pitchFamily="34" charset="-122"/>
                 <a:cs typeface="Calibri" pitchFamily="34" charset="-120"/>
               </a:rPr>
-              <a:t>•</a:t>
-            </a:r>
-            <a:endParaRPr lang="en-US" sz="1300" dirty="0"/>
-          </a:p>
-        </p:txBody>
-      </p:sp>
-      <p:sp>
-        <p:nvSpPr>
-          <p:cNvPr id="11" name="Text 9"/>
-          <p:cNvSpPr/>
-          <p:nvPr/>
-        </p:nvSpPr>
-        <p:spPr>
-          <a:xfrm>
-            <a:off x="914400" y="3621024"/>
-            <a:ext cx="10332720" cy="685800"/>
-          </a:xfrm>
-          <a:prstGeom prst="rect">
-            <a:avLst/>
-          </a:prstGeom>
-          <a:noFill/>
-          <a:ln/>
-        </p:spPr>
-        <p:txBody>
-          <a:bodyPr wrap="square" lIns="25400" tIns="25400" rIns="25400" bIns="25400" rtlCol="0" anchor="t"/>
-          <a:lstStyle/>
-          <a:p>
-            <a:pPr marL="0" indent="0" algn="l">
-              <a:buNone/>
-            </a:pPr>
+              <a:t>manual-approval</a:t>
+            </a:r>
             <a:r>
               <a:rPr lang="en-US" sz="1250" dirty="0">
                 <a:solidFill>
@@ -7395,7 +7145,7 @@
                 <a:ea typeface="Calibri" pitchFamily="34" charset="-122"/>
                 <a:cs typeface="Calibri" pitchFamily="34" charset="-120"/>
               </a:rPr>
-              <a:t>Application-layer service modules built for all four domains (training, nutrition, progress, dashboard).</a:t>
+              <a:t>.</a:t>
             </a:r>
             <a:endParaRPr lang="en-US" sz="1250" dirty="0"/>
           </a:p>
@@ -7409,7 +7159,7 @@
         </p:nvSpPr>
         <p:spPr>
           <a:xfrm>
-            <a:off x="640080" y="4389120"/>
+            <a:off x="640080" y="3516127"/>
             <a:ext cx="228600" cy="457200"/>
           </a:xfrm>
           <a:prstGeom prst="rect">
@@ -7448,7 +7198,7 @@
         </p:nvSpPr>
         <p:spPr>
           <a:xfrm>
-            <a:off x="914400" y="4370832"/>
+            <a:off x="914400" y="3497839"/>
             <a:ext cx="10332720" cy="685800"/>
           </a:xfrm>
           <a:prstGeom prst="rect">
@@ -8116,7 +7866,7 @@
                 <a:ea typeface="Calibri" pitchFamily="34" charset="-122"/>
                 <a:cs typeface="Calibri" pitchFamily="34" charset="-120"/>
               </a:rPr>
-              <a:t>Deploy the frontend to a public URL and onboard a small pilot group, to see how real, varied training styles actually stress this.</a:t>
+              <a:t>Deploy the frontend to a public URL and onboard a small people group, to see how real, varied training styles actually stress this.</a:t>
             </a:r>
             <a:endParaRPr lang="en-US" sz="1030" dirty="0"/>
           </a:p>
@@ -8181,6 +7931,37 @@
         <p:txBody>
           <a:bodyPr wrap="square" lIns="25400" tIns="25400" rIns="25400" bIns="25400" rtlCol="0" anchor="t"/>
           <a:lstStyle/>
+          <a:p>
+            <a:r>
+              <a:rPr lang="en-US" sz="1030" dirty="0" err="1"/>
+              <a:t>Boufgght</a:t>
+            </a:r>
+            <a:r>
+              <a:rPr lang="en-US" sz="1030" dirty="0"/>
+              <a:t> a domain </a:t>
+            </a:r>
+            <a:r>
+              <a:rPr lang="en-IN" sz="1050" b="1" dirty="0"/>
+              <a:t>weighsfit.in</a:t>
+            </a:r>
+          </a:p>
+          <a:p>
+            <a:pPr marL="0" indent="0" algn="l">
+              <a:buNone/>
+            </a:pPr>
+            <a:r>
+              <a:rPr lang="en-US" sz="1030" dirty="0"/>
+              <a:t> thinking of automating  user approval as they sign in with their email by </a:t>
+            </a:r>
+            <a:r>
+              <a:rPr lang="en-US" sz="1030" dirty="0" err="1"/>
+              <a:t>sensding</a:t>
+            </a:r>
+            <a:r>
+              <a:rPr lang="en-US" sz="1030" dirty="0"/>
+              <a:t> email </a:t>
+            </a:r>
+          </a:p>
           <a:p>
             <a:pPr marL="0" indent="0" algn="l">
               <a:buNone/>
@@ -8715,7 +8496,7 @@
                 <a:ea typeface="Cambria" pitchFamily="34" charset="-122"/>
                 <a:cs typeface="Cambria" pitchFamily="34" charset="-120"/>
               </a:rPr>
-              <a:t>What I'll Cover</a:t>
+              <a:t>What We'll Cover</a:t>
             </a:r>
             <a:endParaRPr lang="en-US" sz="2800" dirty="0"/>
           </a:p>
@@ -10176,7 +9957,7 @@
                 <a:ea typeface="Calibri" pitchFamily="34" charset="-122"/>
                 <a:cs typeface="Calibri" pitchFamily="34" charset="-120"/>
               </a:rPr>
-              <a:t>Design a fully normalized (3NF) relational schema spanning training, nutrition, and progress domains, with correct FK relationships and supporting indexes.</a:t>
+              <a:t>Design a fully relational schema spanning training, nutrition, and progress domains, with correct FK relationships.</a:t>
             </a:r>
             <a:endParaRPr lang="en-US" sz="1300" dirty="0"/>
           </a:p>
@@ -10320,9 +10101,6 @@
           <a:bodyPr wrap="square" lIns="25400" tIns="25400" rIns="25400" bIns="25400" rtlCol="0" anchor="t"/>
           <a:lstStyle/>
           <a:p>
-            <a:pPr marL="0" indent="0" algn="l">
-              <a:buNone/>
-            </a:pPr>
             <a:r>
               <a:rPr lang="en-US" sz="1300" dirty="0">
                 <a:solidFill>
@@ -10659,6 +10437,713 @@
 </file>
 
 <file path=ppt/slides/slide5.xml><?xml version="1.0" encoding="utf-8"?>
+<p:sld xmlns:a="http://schemas.openxmlformats.org/drawingml/2006/main" xmlns:r="http://schemas.openxmlformats.org/officeDocument/2006/relationships" xmlns:p="http://schemas.openxmlformats.org/presentationml/2006/main">
+  <p:cSld>
+    <p:bg>
+      <p:bgPr>
+        <a:solidFill>
+          <a:srgbClr val="FFFFFF"/>
+        </a:solidFill>
+        <a:effectLst/>
+      </p:bgPr>
+    </p:bg>
+    <p:spTree>
+      <p:nvGrpSpPr>
+        <p:cNvPr id="1" name="">
+          <a:extLst>
+            <a:ext uri="{FF2B5EF4-FFF2-40B4-BE49-F238E27FC236}">
+              <a16:creationId xmlns:a16="http://schemas.microsoft.com/office/drawing/2014/main" id="{CA964100-57C4-0160-4E8A-9182AA1952D2}"/>
+            </a:ext>
+          </a:extLst>
+        </p:cNvPr>
+        <p:cNvGrpSpPr/>
+        <p:nvPr/>
+      </p:nvGrpSpPr>
+      <p:grpSpPr>
+        <a:xfrm>
+          <a:off x="0" y="0"/>
+          <a:ext cx="0" cy="0"/>
+          <a:chOff x="0" y="0"/>
+          <a:chExt cx="0" cy="0"/>
+        </a:xfrm>
+      </p:grpSpPr>
+      <p:sp>
+        <p:nvSpPr>
+          <p:cNvPr id="2" name="Text 0">
+            <a:extLst>
+              <a:ext uri="{FF2B5EF4-FFF2-40B4-BE49-F238E27FC236}">
+                <a16:creationId xmlns:a16="http://schemas.microsoft.com/office/drawing/2014/main" id="{3645A353-B6BF-6E16-F230-71B5773BB12F}"/>
+              </a:ext>
+            </a:extLst>
+          </p:cNvPr>
+          <p:cNvSpPr/>
+          <p:nvPr/>
+        </p:nvSpPr>
+        <p:spPr>
+          <a:xfrm>
+            <a:off x="457200" y="320040"/>
+            <a:ext cx="11274552" cy="548640"/>
+          </a:xfrm>
+          <a:prstGeom prst="rect">
+            <a:avLst/>
+          </a:prstGeom>
+          <a:noFill/>
+          <a:ln/>
+        </p:spPr>
+        <p:txBody>
+          <a:bodyPr wrap="square" lIns="0" tIns="0" rIns="0" bIns="0" rtlCol="0" anchor="ctr"/>
+          <a:lstStyle/>
+          <a:p>
+            <a:pPr marL="0" indent="0" algn="l">
+              <a:buNone/>
+            </a:pPr>
+            <a:r>
+              <a:rPr lang="en-US" sz="2800" b="1" dirty="0" err="1">
+                <a:solidFill>
+                  <a:srgbClr val="1F3B57"/>
+                </a:solidFill>
+                <a:latin typeface="Cambria" pitchFamily="34" charset="0"/>
+                <a:ea typeface="Cambria" pitchFamily="34" charset="-122"/>
+                <a:cs typeface="Cambria" pitchFamily="34" charset="-120"/>
+              </a:rPr>
+              <a:t>FitStack’s</a:t>
+            </a:r>
+            <a:r>
+              <a:rPr lang="en-US" sz="2800" b="1" dirty="0">
+                <a:solidFill>
+                  <a:srgbClr val="1F3B57"/>
+                </a:solidFill>
+                <a:latin typeface="Cambria" pitchFamily="34" charset="0"/>
+                <a:ea typeface="Cambria" pitchFamily="34" charset="-122"/>
+                <a:cs typeface="Cambria" pitchFamily="34" charset="-120"/>
+              </a:rPr>
+              <a:t> Tech Stack</a:t>
+            </a:r>
+            <a:endParaRPr lang="en-US" sz="2800" dirty="0"/>
+          </a:p>
+        </p:txBody>
+      </p:sp>
+      <p:sp>
+        <p:nvSpPr>
+          <p:cNvPr id="3" name="Text 1">
+            <a:extLst>
+              <a:ext uri="{FF2B5EF4-FFF2-40B4-BE49-F238E27FC236}">
+                <a16:creationId xmlns:a16="http://schemas.microsoft.com/office/drawing/2014/main" id="{E8BC22A8-E9CB-BD05-78E9-33CDBED6D25B}"/>
+              </a:ext>
+            </a:extLst>
+          </p:cNvPr>
+          <p:cNvSpPr/>
+          <p:nvPr/>
+        </p:nvSpPr>
+        <p:spPr>
+          <a:xfrm>
+            <a:off x="457200" y="868680"/>
+            <a:ext cx="11247120" cy="274320"/>
+          </a:xfrm>
+          <a:prstGeom prst="rect">
+            <a:avLst/>
+          </a:prstGeom>
+          <a:noFill/>
+          <a:ln/>
+        </p:spPr>
+        <p:txBody>
+          <a:bodyPr wrap="square" lIns="25400" tIns="25400" rIns="25400" bIns="25400" rtlCol="0" anchor="ctr"/>
+          <a:lstStyle/>
+          <a:p>
+            <a:pPr marL="0" indent="0" algn="l">
+              <a:buNone/>
+            </a:pPr>
+            <a:endParaRPr lang="en-US" sz="1100" dirty="0"/>
+          </a:p>
+        </p:txBody>
+      </p:sp>
+      <p:sp>
+        <p:nvSpPr>
+          <p:cNvPr id="4" name="Text 2">
+            <a:extLst>
+              <a:ext uri="{FF2B5EF4-FFF2-40B4-BE49-F238E27FC236}">
+                <a16:creationId xmlns:a16="http://schemas.microsoft.com/office/drawing/2014/main" id="{412240DA-A06A-4F53-6AC3-371B9029B61F}"/>
+              </a:ext>
+            </a:extLst>
+          </p:cNvPr>
+          <p:cNvSpPr/>
+          <p:nvPr/>
+        </p:nvSpPr>
+        <p:spPr>
+          <a:xfrm>
+            <a:off x="457200" y="1234440"/>
+            <a:ext cx="5394960" cy="274320"/>
+          </a:xfrm>
+          <a:prstGeom prst="rect">
+            <a:avLst/>
+          </a:prstGeom>
+          <a:noFill/>
+          <a:ln/>
+        </p:spPr>
+        <p:txBody>
+          <a:bodyPr wrap="square" lIns="25400" tIns="25400" rIns="25400" bIns="25400" rtlCol="0" anchor="ctr"/>
+          <a:lstStyle/>
+          <a:p>
+            <a:pPr marL="0" indent="0" algn="l">
+              <a:buNone/>
+            </a:pPr>
+            <a:r>
+              <a:rPr lang="en-US" sz="1300" b="1" dirty="0">
+                <a:solidFill>
+                  <a:srgbClr val="1F3B57"/>
+                </a:solidFill>
+                <a:latin typeface="Calibri" pitchFamily="34" charset="0"/>
+                <a:ea typeface="Calibri" pitchFamily="34" charset="-122"/>
+                <a:cs typeface="Calibri" pitchFamily="34" charset="-120"/>
+              </a:rPr>
+              <a:t>Frontend</a:t>
+            </a:r>
+            <a:endParaRPr lang="en-US" sz="1300" dirty="0"/>
+          </a:p>
+        </p:txBody>
+      </p:sp>
+      <p:sp>
+        <p:nvSpPr>
+          <p:cNvPr id="5" name="Shape 3">
+            <a:extLst>
+              <a:ext uri="{FF2B5EF4-FFF2-40B4-BE49-F238E27FC236}">
+                <a16:creationId xmlns:a16="http://schemas.microsoft.com/office/drawing/2014/main" id="{D3443B97-A4BF-EBC9-6609-B44A91CA3D22}"/>
+              </a:ext>
+            </a:extLst>
+          </p:cNvPr>
+          <p:cNvSpPr/>
+          <p:nvPr/>
+        </p:nvSpPr>
+        <p:spPr>
+          <a:xfrm>
+            <a:off x="274320" y="1508760"/>
+            <a:ext cx="5394960" cy="1783080"/>
+          </a:xfrm>
+          <a:prstGeom prst="rect">
+            <a:avLst/>
+          </a:prstGeom>
+          <a:solidFill>
+            <a:srgbClr val="F2F2F2"/>
+          </a:solidFill>
+          <a:ln w="12700">
+            <a:solidFill>
+              <a:srgbClr val="BFBFBF"/>
+            </a:solidFill>
+            <a:prstDash val="solid"/>
+          </a:ln>
+        </p:spPr>
+        <p:txBody>
+          <a:bodyPr/>
+          <a:lstStyle/>
+          <a:p>
+            <a:endParaRPr lang="en-IN" dirty="0"/>
+          </a:p>
+        </p:txBody>
+      </p:sp>
+      <p:sp>
+        <p:nvSpPr>
+          <p:cNvPr id="6" name="Text 4">
+            <a:extLst>
+              <a:ext uri="{FF2B5EF4-FFF2-40B4-BE49-F238E27FC236}">
+                <a16:creationId xmlns:a16="http://schemas.microsoft.com/office/drawing/2014/main" id="{E4308CA5-CD41-317A-F4B5-D6F55D548938}"/>
+              </a:ext>
+            </a:extLst>
+          </p:cNvPr>
+          <p:cNvSpPr/>
+          <p:nvPr/>
+        </p:nvSpPr>
+        <p:spPr>
+          <a:xfrm>
+            <a:off x="640080" y="1636776"/>
+            <a:ext cx="5029200" cy="1600200"/>
+          </a:xfrm>
+          <a:prstGeom prst="rect">
+            <a:avLst/>
+          </a:prstGeom>
+          <a:noFill/>
+          <a:ln/>
+        </p:spPr>
+        <p:txBody>
+          <a:bodyPr wrap="square" lIns="25400" tIns="25400" rIns="25400" bIns="25400" rtlCol="0" anchor="t"/>
+          <a:lstStyle/>
+          <a:p>
+            <a:pPr marL="285750" indent="-285750">
+              <a:buFont typeface="Arial" panose="020B0604020202020204" pitchFamily="34" charset="0"/>
+              <a:buChar char="•"/>
+            </a:pPr>
+            <a:r>
+              <a:rPr lang="en-IN" sz="1250" dirty="0">
+                <a:latin typeface="+mj-lt"/>
+              </a:rPr>
+              <a:t>React + TypeScript</a:t>
+            </a:r>
+          </a:p>
+          <a:p>
+            <a:pPr marL="285750" indent="-285750">
+              <a:buFont typeface="Arial" panose="020B0604020202020204" pitchFamily="34" charset="0"/>
+              <a:buChar char="•"/>
+            </a:pPr>
+            <a:r>
+              <a:rPr lang="en-IN" sz="1250" dirty="0">
+                <a:latin typeface="+mj-lt"/>
+              </a:rPr>
+              <a:t>handles the login screen, dashboard, workouts, nutrition tracking, and progress pages</a:t>
+            </a:r>
+            <a:endParaRPr lang="en-US" sz="1250" dirty="0">
+              <a:latin typeface="+mj-lt"/>
+            </a:endParaRPr>
+          </a:p>
+        </p:txBody>
+      </p:sp>
+      <p:sp>
+        <p:nvSpPr>
+          <p:cNvPr id="7" name="Text 5">
+            <a:extLst>
+              <a:ext uri="{FF2B5EF4-FFF2-40B4-BE49-F238E27FC236}">
+                <a16:creationId xmlns:a16="http://schemas.microsoft.com/office/drawing/2014/main" id="{67A7F9DB-62CF-9AC5-27A1-BCA359B4BF91}"/>
+              </a:ext>
+            </a:extLst>
+          </p:cNvPr>
+          <p:cNvSpPr/>
+          <p:nvPr/>
+        </p:nvSpPr>
+        <p:spPr>
+          <a:xfrm>
+            <a:off x="6172200" y="1234440"/>
+            <a:ext cx="5394960" cy="274320"/>
+          </a:xfrm>
+          <a:prstGeom prst="rect">
+            <a:avLst/>
+          </a:prstGeom>
+          <a:noFill/>
+          <a:ln/>
+        </p:spPr>
+        <p:txBody>
+          <a:bodyPr wrap="square" lIns="25400" tIns="25400" rIns="25400" bIns="25400" rtlCol="0" anchor="ctr"/>
+          <a:lstStyle/>
+          <a:p>
+            <a:pPr marL="0" indent="0" algn="l">
+              <a:buNone/>
+            </a:pPr>
+            <a:r>
+              <a:rPr lang="en-US" sz="1300" b="1" dirty="0">
+                <a:solidFill>
+                  <a:srgbClr val="1F3B57"/>
+                </a:solidFill>
+                <a:latin typeface="Calibri" pitchFamily="34" charset="0"/>
+                <a:ea typeface="Calibri" pitchFamily="34" charset="-122"/>
+                <a:cs typeface="Calibri" pitchFamily="34" charset="-120"/>
+              </a:rPr>
+              <a:t>Backend</a:t>
+            </a:r>
+            <a:endParaRPr lang="en-US" sz="1300" dirty="0"/>
+          </a:p>
+        </p:txBody>
+      </p:sp>
+      <p:sp>
+        <p:nvSpPr>
+          <p:cNvPr id="8" name="Shape 6">
+            <a:extLst>
+              <a:ext uri="{FF2B5EF4-FFF2-40B4-BE49-F238E27FC236}">
+                <a16:creationId xmlns:a16="http://schemas.microsoft.com/office/drawing/2014/main" id="{D7042715-A243-1228-31F4-9B0A40E713A4}"/>
+              </a:ext>
+            </a:extLst>
+          </p:cNvPr>
+          <p:cNvSpPr/>
+          <p:nvPr/>
+        </p:nvSpPr>
+        <p:spPr>
+          <a:xfrm>
+            <a:off x="6217920" y="1481328"/>
+            <a:ext cx="5394960" cy="1783080"/>
+          </a:xfrm>
+          <a:prstGeom prst="rect">
+            <a:avLst/>
+          </a:prstGeom>
+          <a:solidFill>
+            <a:srgbClr val="F2F2F2"/>
+          </a:solidFill>
+          <a:ln w="12700">
+            <a:solidFill>
+              <a:srgbClr val="BFBFBF"/>
+            </a:solidFill>
+            <a:prstDash val="solid"/>
+          </a:ln>
+        </p:spPr>
+      </p:sp>
+      <p:sp>
+        <p:nvSpPr>
+          <p:cNvPr id="9" name="Text 7">
+            <a:extLst>
+              <a:ext uri="{FF2B5EF4-FFF2-40B4-BE49-F238E27FC236}">
+                <a16:creationId xmlns:a16="http://schemas.microsoft.com/office/drawing/2014/main" id="{3F931246-CC1E-5210-2225-0CA821F30DFF}"/>
+              </a:ext>
+            </a:extLst>
+          </p:cNvPr>
+          <p:cNvSpPr/>
+          <p:nvPr/>
+        </p:nvSpPr>
+        <p:spPr>
+          <a:xfrm>
+            <a:off x="6355080" y="1636776"/>
+            <a:ext cx="5029200" cy="1600200"/>
+          </a:xfrm>
+          <a:prstGeom prst="rect">
+            <a:avLst/>
+          </a:prstGeom>
+          <a:noFill/>
+          <a:ln/>
+        </p:spPr>
+        <p:txBody>
+          <a:bodyPr wrap="square" lIns="25400" tIns="25400" rIns="25400" bIns="25400" rtlCol="0" anchor="t"/>
+          <a:lstStyle/>
+          <a:p>
+            <a:pPr marL="285750" indent="-285750">
+              <a:buFont typeface="Arial" panose="020B0604020202020204" pitchFamily="34" charset="0"/>
+              <a:buChar char="•"/>
+            </a:pPr>
+            <a:r>
+              <a:rPr lang="en-IN" sz="1250" dirty="0">
+                <a:latin typeface="+mj-lt"/>
+              </a:rPr>
+              <a:t>Postgres database schema</a:t>
+            </a:r>
+          </a:p>
+          <a:p>
+            <a:pPr marL="285750" indent="-285750">
+              <a:buFont typeface="Arial" panose="020B0604020202020204" pitchFamily="34" charset="0"/>
+              <a:buChar char="•"/>
+            </a:pPr>
+            <a:r>
+              <a:rPr lang="en-IN" sz="1250" dirty="0">
+                <a:latin typeface="+mj-lt"/>
+              </a:rPr>
+              <a:t>Auth in </a:t>
+            </a:r>
+            <a:r>
+              <a:rPr lang="en-IN" sz="1250" dirty="0" err="1">
+                <a:latin typeface="+mj-lt"/>
+              </a:rPr>
+              <a:t>Supabase</a:t>
+            </a:r>
+            <a:r>
+              <a:rPr lang="en-IN" sz="1250" dirty="0">
+                <a:latin typeface="+mj-lt"/>
+              </a:rPr>
+              <a:t> Auth</a:t>
+            </a:r>
+          </a:p>
+          <a:p>
+            <a:pPr marL="285750" indent="-285750">
+              <a:buFont typeface="Arial" panose="020B0604020202020204" pitchFamily="34" charset="0"/>
+              <a:buChar char="•"/>
+            </a:pPr>
+            <a:r>
+              <a:rPr lang="en-IN" sz="1250" dirty="0">
+                <a:latin typeface="+mj-lt"/>
+              </a:rPr>
+              <a:t>It stores all user data, handles login/auth, and enforces rules for who can see/edit data.</a:t>
+            </a:r>
+          </a:p>
+          <a:p>
+            <a:endParaRPr lang="en-IN" sz="1250" dirty="0">
+              <a:latin typeface="+mj-lt"/>
+            </a:endParaRPr>
+          </a:p>
+          <a:p>
+            <a:endParaRPr lang="en-IN" sz="1250" dirty="0">
+              <a:latin typeface="+mj-lt"/>
+            </a:endParaRPr>
+          </a:p>
+        </p:txBody>
+      </p:sp>
+      <p:sp>
+        <p:nvSpPr>
+          <p:cNvPr id="16" name="Text 14">
+            <a:extLst>
+              <a:ext uri="{FF2B5EF4-FFF2-40B4-BE49-F238E27FC236}">
+                <a16:creationId xmlns:a16="http://schemas.microsoft.com/office/drawing/2014/main" id="{4E25E99F-620A-C1C3-100F-2A6A32D19D19}"/>
+              </a:ext>
+            </a:extLst>
+          </p:cNvPr>
+          <p:cNvSpPr/>
+          <p:nvPr/>
+        </p:nvSpPr>
+        <p:spPr>
+          <a:xfrm>
+            <a:off x="11612880" y="6537960"/>
+            <a:ext cx="457200" cy="274320"/>
+          </a:xfrm>
+          <a:prstGeom prst="rect">
+            <a:avLst/>
+          </a:prstGeom>
+          <a:noFill/>
+          <a:ln/>
+        </p:spPr>
+        <p:txBody>
+          <a:bodyPr wrap="square" lIns="0" tIns="0" rIns="0" bIns="0" rtlCol="0" anchor="ctr"/>
+          <a:lstStyle/>
+          <a:p>
+            <a:pPr marL="0" indent="0" algn="r">
+              <a:buNone/>
+            </a:pPr>
+            <a:r>
+              <a:rPr lang="en-US" sz="1000" dirty="0">
+                <a:solidFill>
+                  <a:srgbClr val="8C8C8C"/>
+                </a:solidFill>
+                <a:latin typeface="Calibri" pitchFamily="34" charset="0"/>
+                <a:ea typeface="Calibri" pitchFamily="34" charset="-122"/>
+                <a:cs typeface="Calibri" pitchFamily="34" charset="-120"/>
+              </a:rPr>
+              <a:t>13</a:t>
+            </a:r>
+            <a:endParaRPr lang="en-US" sz="1000" dirty="0"/>
+          </a:p>
+        </p:txBody>
+      </p:sp>
+      <p:sp>
+        <p:nvSpPr>
+          <p:cNvPr id="17" name="Text 15">
+            <a:extLst>
+              <a:ext uri="{FF2B5EF4-FFF2-40B4-BE49-F238E27FC236}">
+                <a16:creationId xmlns:a16="http://schemas.microsoft.com/office/drawing/2014/main" id="{5A53C39F-A3B7-67B1-25CF-62454B9C0401}"/>
+              </a:ext>
+            </a:extLst>
+          </p:cNvPr>
+          <p:cNvSpPr/>
+          <p:nvPr/>
+        </p:nvSpPr>
+        <p:spPr>
+          <a:xfrm>
+            <a:off x="457200" y="6537960"/>
+            <a:ext cx="4572000" cy="274320"/>
+          </a:xfrm>
+          <a:prstGeom prst="rect">
+            <a:avLst/>
+          </a:prstGeom>
+          <a:noFill/>
+          <a:ln/>
+        </p:spPr>
+        <p:txBody>
+          <a:bodyPr wrap="square" lIns="0" tIns="0" rIns="0" bIns="0" rtlCol="0" anchor="ctr"/>
+          <a:lstStyle/>
+          <a:p>
+            <a:pPr marL="0" indent="0" algn="l">
+              <a:buNone/>
+            </a:pPr>
+            <a:r>
+              <a:rPr lang="en-US" sz="900" dirty="0">
+                <a:solidFill>
+                  <a:srgbClr val="8C8C8C"/>
+                </a:solidFill>
+                <a:latin typeface="Calibri" pitchFamily="34" charset="0"/>
+                <a:ea typeface="Calibri" pitchFamily="34" charset="-122"/>
+                <a:cs typeface="Calibri" pitchFamily="34" charset="-120"/>
+              </a:rPr>
+              <a:t>FitStack — DBMS Zeroth Review</a:t>
+            </a:r>
+            <a:endParaRPr lang="en-US" sz="900" dirty="0"/>
+          </a:p>
+        </p:txBody>
+      </p:sp>
+      <p:sp>
+        <p:nvSpPr>
+          <p:cNvPr id="20" name="Shape 3">
+            <a:extLst>
+              <a:ext uri="{FF2B5EF4-FFF2-40B4-BE49-F238E27FC236}">
+                <a16:creationId xmlns:a16="http://schemas.microsoft.com/office/drawing/2014/main" id="{C71773EB-3189-568A-CBA8-64A48791CFE4}"/>
+              </a:ext>
+            </a:extLst>
+          </p:cNvPr>
+          <p:cNvSpPr/>
+          <p:nvPr/>
+        </p:nvSpPr>
+        <p:spPr>
+          <a:xfrm>
+            <a:off x="3030460" y="3931920"/>
+            <a:ext cx="5394960" cy="1783080"/>
+          </a:xfrm>
+          <a:prstGeom prst="rect">
+            <a:avLst/>
+          </a:prstGeom>
+          <a:solidFill>
+            <a:srgbClr val="F2F2F2"/>
+          </a:solidFill>
+          <a:ln w="12700">
+            <a:solidFill>
+              <a:srgbClr val="BFBFBF"/>
+            </a:solidFill>
+            <a:prstDash val="solid"/>
+          </a:ln>
+        </p:spPr>
+        <p:txBody>
+          <a:bodyPr/>
+          <a:lstStyle/>
+          <a:p>
+            <a:endParaRPr lang="en-IN" dirty="0"/>
+          </a:p>
+        </p:txBody>
+      </p:sp>
+      <p:sp>
+        <p:nvSpPr>
+          <p:cNvPr id="21" name="TextBox 20">
+            <a:extLst>
+              <a:ext uri="{FF2B5EF4-FFF2-40B4-BE49-F238E27FC236}">
+                <a16:creationId xmlns:a16="http://schemas.microsoft.com/office/drawing/2014/main" id="{BE64B425-B871-F3EE-D82C-69DD2A23F80B}"/>
+              </a:ext>
+            </a:extLst>
+          </p:cNvPr>
+          <p:cNvSpPr txBox="1"/>
+          <p:nvPr/>
+        </p:nvSpPr>
+        <p:spPr>
+          <a:xfrm>
+            <a:off x="3260785" y="4623758"/>
+            <a:ext cx="4934309" cy="523220"/>
+          </a:xfrm>
+          <a:prstGeom prst="rect">
+            <a:avLst/>
+          </a:prstGeom>
+          <a:noFill/>
+        </p:spPr>
+        <p:txBody>
+          <a:bodyPr wrap="square" rtlCol="0">
+            <a:spAutoFit/>
+          </a:bodyPr>
+          <a:lstStyle/>
+          <a:p>
+            <a:pPr marL="285750" indent="-285750">
+              <a:buFont typeface="Arial" panose="020B0604020202020204" pitchFamily="34" charset="0"/>
+              <a:buChar char="•"/>
+            </a:pPr>
+            <a:r>
+              <a:rPr lang="en-IN" sz="1400" dirty="0">
+                <a:latin typeface="+mj-lt"/>
+              </a:rPr>
+              <a:t>the frontend talks to </a:t>
+            </a:r>
+            <a:r>
+              <a:rPr lang="en-IN" sz="1400" dirty="0" err="1">
+                <a:latin typeface="+mj-lt"/>
+              </a:rPr>
+              <a:t>Supabase</a:t>
+            </a:r>
+            <a:r>
+              <a:rPr lang="en-IN" sz="1400" dirty="0">
+                <a:latin typeface="+mj-lt"/>
+              </a:rPr>
+              <a:t> directly for data and authentication</a:t>
+            </a:r>
+          </a:p>
+        </p:txBody>
+      </p:sp>
+      <p:sp>
+        <p:nvSpPr>
+          <p:cNvPr id="24" name="Arrow: Bent-Up 23">
+            <a:extLst>
+              <a:ext uri="{FF2B5EF4-FFF2-40B4-BE49-F238E27FC236}">
+                <a16:creationId xmlns:a16="http://schemas.microsoft.com/office/drawing/2014/main" id="{BF8012A3-A9CC-FFA5-61AB-3AD1E3B86E01}"/>
+              </a:ext>
+            </a:extLst>
+          </p:cNvPr>
+          <p:cNvSpPr/>
+          <p:nvPr/>
+        </p:nvSpPr>
+        <p:spPr>
+          <a:xfrm>
+            <a:off x="8471140" y="3236976"/>
+            <a:ext cx="1451825" cy="1616611"/>
+          </a:xfrm>
+          <a:prstGeom prst="bentUpArrow">
+            <a:avLst/>
+          </a:prstGeom>
+        </p:spPr>
+        <p:style>
+          <a:lnRef idx="2">
+            <a:schemeClr val="accent1">
+              <a:shade val="15000"/>
+            </a:schemeClr>
+          </a:lnRef>
+          <a:fillRef idx="1">
+            <a:schemeClr val="accent1"/>
+          </a:fillRef>
+          <a:effectRef idx="0">
+            <a:schemeClr val="accent1"/>
+          </a:effectRef>
+          <a:fontRef idx="minor">
+            <a:schemeClr val="lt1"/>
+          </a:fontRef>
+        </p:style>
+        <p:txBody>
+          <a:bodyPr rtlCol="0" anchor="ctr"/>
+          <a:lstStyle/>
+          <a:p>
+            <a:pPr algn="ctr"/>
+            <a:endParaRPr lang="en-IN"/>
+          </a:p>
+        </p:txBody>
+      </p:sp>
+      <p:sp>
+        <p:nvSpPr>
+          <p:cNvPr id="26" name="Arrow: Bent-Up 25">
+            <a:extLst>
+              <a:ext uri="{FF2B5EF4-FFF2-40B4-BE49-F238E27FC236}">
+                <a16:creationId xmlns:a16="http://schemas.microsoft.com/office/drawing/2014/main" id="{48080CE4-4D47-D309-813C-E08D4F867963}"/>
+              </a:ext>
+            </a:extLst>
+          </p:cNvPr>
+          <p:cNvSpPr/>
+          <p:nvPr/>
+        </p:nvSpPr>
+        <p:spPr>
+          <a:xfrm rot="5400000">
+            <a:off x="1234062" y="3153335"/>
+            <a:ext cx="1657889" cy="1934904"/>
+          </a:xfrm>
+          <a:prstGeom prst="bentUpArrow">
+            <a:avLst/>
+          </a:prstGeom>
+        </p:spPr>
+        <p:style>
+          <a:lnRef idx="2">
+            <a:schemeClr val="accent1">
+              <a:shade val="15000"/>
+            </a:schemeClr>
+          </a:lnRef>
+          <a:fillRef idx="1">
+            <a:schemeClr val="accent1"/>
+          </a:fillRef>
+          <a:effectRef idx="0">
+            <a:schemeClr val="accent1"/>
+          </a:effectRef>
+          <a:fontRef idx="minor">
+            <a:schemeClr val="lt1"/>
+          </a:fontRef>
+        </p:style>
+        <p:txBody>
+          <a:bodyPr rtlCol="0" anchor="ctr"/>
+          <a:lstStyle/>
+          <a:p>
+            <a:pPr algn="ctr"/>
+            <a:endParaRPr lang="en-IN"/>
+          </a:p>
+        </p:txBody>
+      </p:sp>
+    </p:spTree>
+    <p:extLst>
+      <p:ext uri="{BB962C8B-B14F-4D97-AF65-F5344CB8AC3E}">
+        <p14:creationId xmlns:p14="http://schemas.microsoft.com/office/powerpoint/2010/main" val="867984466"/>
+      </p:ext>
+    </p:extLst>
+  </p:cSld>
+  <p:clrMapOvr>
+    <a:masterClrMapping/>
+  </p:clrMapOvr>
+</p:sld>
+</file>
+
+<file path=ppt/slides/slide6.xml><?xml version="1.0" encoding="utf-8"?>
 <p:sld xmlns:a="http://schemas.openxmlformats.org/drawingml/2006/main" xmlns:r="http://schemas.openxmlformats.org/officeDocument/2006/relationships" xmlns:p="http://schemas.openxmlformats.org/presentationml/2006/main">
   <p:cSld name="Slide 5">
     <p:bg>
@@ -10731,7 +11216,7 @@
           <p:nvPr>
             <p:extLst>
               <p:ext uri="{D42A27DB-BD31-4B8C-83A1-F6EECF244321}">
-                <p14:modId xmlns:p14="http://schemas.microsoft.com/office/powerpoint/2010/main" val="1579011935"/>
+                <p14:modId xmlns:p14="http://schemas.microsoft.com/office/powerpoint/2010/main" val="3413899563"/>
               </p:ext>
             </p:extLst>
           </p:nvPr>
@@ -10921,28 +11406,7 @@
                           <a:ea typeface="Calibri" pitchFamily="34" charset="-122"/>
                           <a:cs typeface="Calibri" pitchFamily="34" charset="-120"/>
                         </a:rPr>
-                        <a:t>Trainee</a:t>
-                      </a:r>
-                      <a:endParaRPr lang="en-US" sz="1250" dirty="0">
-                        <a:latin typeface="Calibri" charset="0"/>
-                        <a:ea typeface="Calibri" charset="0"/>
-                        <a:cs typeface="Calibri" charset="0"/>
-                      </a:endParaRPr>
-                    </a:p>
-                    <a:p>
-                      <a:pPr marL="0" indent="0">
-                        <a:buNone/>
-                      </a:pPr>
-                      <a:r>
-                        <a:rPr lang="en-US" sz="1250" b="1" dirty="0">
-                          <a:solidFill>
-                            <a:srgbClr val="262626"/>
-                          </a:solidFill>
-                          <a:latin typeface="Calibri" pitchFamily="34" charset="0"/>
-                          <a:ea typeface="Calibri" pitchFamily="34" charset="-122"/>
-                          <a:cs typeface="Calibri" pitchFamily="34" charset="-120"/>
-                        </a:rPr>
-                        <a:t>(end user)</a:t>
+                        <a:t>End user</a:t>
                       </a:r>
                       <a:endParaRPr lang="en-US" sz="1250" dirty="0">
                         <a:latin typeface="Calibri" charset="0"/>
@@ -11165,7 +11629,61 @@
                           <a:ea typeface="Calibri" pitchFamily="34" charset="-122"/>
                           <a:cs typeface="Calibri" pitchFamily="34" charset="-120"/>
                         </a:rPr>
-                        <a:t>Reviews new signups and sets profiles.approved = true before an account can write training/nutrition/progress data. Not yet a formal database role/flag — currently whoever has direct project access. Stated as a known, deliberate limitation at this stage.</a:t>
+                        <a:t>Reviews new signups and sets profiles.approved = true before an account can write training/nutrition/progress data. </a:t>
+                      </a:r>
+                    </a:p>
+                    <a:p>
+                      <a:pPr marL="0" indent="0">
+                        <a:buNone/>
+                      </a:pPr>
+                      <a:r>
+                        <a:rPr lang="en-US" sz="1250" dirty="0">
+                          <a:solidFill>
+                            <a:srgbClr val="262626"/>
+                          </a:solidFill>
+                          <a:latin typeface="Calibri" pitchFamily="34" charset="0"/>
+                          <a:ea typeface="Calibri" pitchFamily="34" charset="-122"/>
+                          <a:cs typeface="Calibri" pitchFamily="34" charset="-120"/>
+                        </a:rPr>
+                        <a:t>Not yet a formal database approval — currently we  has direct project access via </a:t>
+                      </a:r>
+                      <a:r>
+                        <a:rPr lang="en-US" sz="1250" dirty="0" err="1">
+                          <a:solidFill>
+                            <a:srgbClr val="262626"/>
+                          </a:solidFill>
+                          <a:latin typeface="Calibri" pitchFamily="34" charset="0"/>
+                          <a:ea typeface="Calibri" pitchFamily="34" charset="-122"/>
+                          <a:cs typeface="Calibri" pitchFamily="34" charset="-120"/>
+                        </a:rPr>
+                        <a:t>supabase</a:t>
+                      </a:r>
+                      <a:r>
+                        <a:rPr lang="en-US" sz="1250" dirty="0">
+                          <a:solidFill>
+                            <a:srgbClr val="262626"/>
+                          </a:solidFill>
+                          <a:latin typeface="Calibri" pitchFamily="34" charset="0"/>
+                          <a:ea typeface="Calibri" pitchFamily="34" charset="-122"/>
+                          <a:cs typeface="Calibri" pitchFamily="34" charset="-120"/>
+                        </a:rPr>
+                        <a:t>..</a:t>
+                      </a:r>
+                    </a:p>
+                    <a:p>
+                      <a:pPr marL="0" indent="0">
+                        <a:buNone/>
+                      </a:pPr>
+                      <a:r>
+                        <a:rPr lang="en-US" sz="1250" dirty="0">
+                          <a:solidFill>
+                            <a:srgbClr val="262626"/>
+                          </a:solidFill>
+                          <a:latin typeface="Calibri" pitchFamily="34" charset="0"/>
+                          <a:ea typeface="Calibri" pitchFamily="34" charset="-122"/>
+                          <a:cs typeface="Calibri" pitchFamily="34" charset="-120"/>
+                        </a:rPr>
+                        <a:t>Stated as a known, deliberate limitation at this stage.</a:t>
                       </a:r>
                       <a:endParaRPr lang="en-US" sz="1250" dirty="0">
                         <a:latin typeface="Calibri" charset="0"/>
@@ -11467,7 +11985,7 @@
 </p:sld>
 </file>
 
-<file path=ppt/slides/slide6.xml><?xml version="1.0" encoding="utf-8"?>
+<file path=ppt/slides/slide7.xml><?xml version="1.0" encoding="utf-8"?>
 <p:sld xmlns:a="http://schemas.openxmlformats.org/drawingml/2006/main" xmlns:r="http://schemas.openxmlformats.org/officeDocument/2006/relationships" xmlns:p="http://schemas.openxmlformats.org/presentationml/2006/main">
   <p:cSld name="Slide 6">
     <p:bg>
@@ -11720,9 +12238,8 @@
                 <a:ea typeface="Calibri" pitchFamily="34" charset="-122"/>
                 <a:cs typeface="Calibri" pitchFamily="34" charset="-120"/>
               </a:rPr>
-              <a:t>Trainee</a:t>
-            </a:r>
-            <a:endParaRPr lang="en-US" sz="1200" dirty="0"/>
+              <a:t>USER</a:t>
+            </a:r>
           </a:p>
         </p:txBody>
       </p:sp>
@@ -13097,7 +13614,7 @@
 </p:sld>
 </file>
 
-<file path=ppt/slides/slide7.xml><?xml version="1.0" encoding="utf-8"?>
+<file path=ppt/slides/slide8.xml><?xml version="1.0" encoding="utf-8"?>
 <p:sld xmlns:a="http://schemas.openxmlformats.org/drawingml/2006/main" xmlns:r="http://schemas.openxmlformats.org/officeDocument/2006/relationships" xmlns:p="http://schemas.openxmlformats.org/presentationml/2006/main">
   <p:cSld name="Slide 7">
     <p:bg>
@@ -13395,7 +13912,7 @@
 </p:sld>
 </file>
 
-<file path=ppt/slides/slide8.xml><?xml version="1.0" encoding="utf-8"?>
+<file path=ppt/slides/slide9.xml><?xml version="1.0" encoding="utf-8"?>
 <p:sld xmlns:a="http://schemas.openxmlformats.org/drawingml/2006/main" xmlns:r="http://schemas.openxmlformats.org/officeDocument/2006/relationships" xmlns:p="http://schemas.openxmlformats.org/presentationml/2006/main">
   <p:cSld name="Slide 8">
     <p:bg>
@@ -14852,830 +15369,6 @@
       <p:sp>
         <p:nvSpPr>
           <p:cNvPr id="6" name="Text 3"/>
-          <p:cNvSpPr/>
-          <p:nvPr/>
-        </p:nvSpPr>
-        <p:spPr>
-          <a:xfrm>
-            <a:off x="457200" y="6537960"/>
-            <a:ext cx="4572000" cy="274320"/>
-          </a:xfrm>
-          <a:prstGeom prst="rect">
-            <a:avLst/>
-          </a:prstGeom>
-          <a:noFill/>
-          <a:ln/>
-        </p:spPr>
-        <p:txBody>
-          <a:bodyPr wrap="square" lIns="0" tIns="0" rIns="0" bIns="0" rtlCol="0" anchor="ctr"/>
-          <a:lstStyle/>
-          <a:p>
-            <a:pPr marL="0" indent="0" algn="l">
-              <a:buNone/>
-            </a:pPr>
-            <a:r>
-              <a:rPr lang="en-US" sz="900" dirty="0">
-                <a:solidFill>
-                  <a:srgbClr val="8C8C8C"/>
-                </a:solidFill>
-                <a:latin typeface="Calibri" pitchFamily="34" charset="0"/>
-                <a:ea typeface="Calibri" pitchFamily="34" charset="-122"/>
-                <a:cs typeface="Calibri" pitchFamily="34" charset="-120"/>
-              </a:rPr>
-              <a:t>FitStack — DBMS Zeroth Review</a:t>
-            </a:r>
-            <a:endParaRPr lang="en-US" sz="900" dirty="0"/>
-          </a:p>
-        </p:txBody>
-      </p:sp>
-    </p:spTree>
-  </p:cSld>
-  <p:clrMapOvr>
-    <a:masterClrMapping/>
-  </p:clrMapOvr>
-</p:sld>
-</file>
-
-<file path=ppt/slides/slide9.xml><?xml version="1.0" encoding="utf-8"?>
-<p:sld xmlns:a="http://schemas.openxmlformats.org/drawingml/2006/main" xmlns:r="http://schemas.openxmlformats.org/officeDocument/2006/relationships" xmlns:p="http://schemas.openxmlformats.org/presentationml/2006/main">
-  <p:cSld name="Slide 9">
-    <p:bg>
-      <p:bgPr>
-        <a:solidFill>
-          <a:srgbClr val="FFFFFF"/>
-        </a:solidFill>
-        <a:effectLst/>
-      </p:bgPr>
-    </p:bg>
-    <p:spTree>
-      <p:nvGrpSpPr>
-        <p:cNvPr id="1" name=""/>
-        <p:cNvGrpSpPr/>
-        <p:nvPr/>
-      </p:nvGrpSpPr>
-      <p:grpSpPr>
-        <a:xfrm>
-          <a:off x="0" y="0"/>
-          <a:ext cx="0" cy="0"/>
-          <a:chOff x="0" y="0"/>
-          <a:chExt cx="0" cy="0"/>
-        </a:xfrm>
-      </p:grpSpPr>
-      <p:sp>
-        <p:nvSpPr>
-          <p:cNvPr id="2" name="Text 0"/>
-          <p:cNvSpPr/>
-          <p:nvPr/>
-        </p:nvSpPr>
-        <p:spPr>
-          <a:xfrm>
-            <a:off x="457200" y="320040"/>
-            <a:ext cx="11274552" cy="548640"/>
-          </a:xfrm>
-          <a:prstGeom prst="rect">
-            <a:avLst/>
-          </a:prstGeom>
-          <a:noFill/>
-          <a:ln/>
-        </p:spPr>
-        <p:txBody>
-          <a:bodyPr wrap="square" lIns="0" tIns="0" rIns="0" bIns="0" rtlCol="0" anchor="ctr"/>
-          <a:lstStyle/>
-          <a:p>
-            <a:pPr marL="0" indent="0" algn="l">
-              <a:buNone/>
-            </a:pPr>
-            <a:r>
-              <a:rPr lang="en-US" sz="2800" b="1" dirty="0">
-                <a:solidFill>
-                  <a:srgbClr val="1F3B57"/>
-                </a:solidFill>
-                <a:latin typeface="Cambria" pitchFamily="34" charset="0"/>
-                <a:ea typeface="Cambria" pitchFamily="34" charset="-122"/>
-                <a:cs typeface="Cambria" pitchFamily="34" charset="-120"/>
-              </a:rPr>
-              <a:t>Relational Schema</a:t>
-            </a:r>
-            <a:endParaRPr lang="en-US" sz="2800" dirty="0"/>
-          </a:p>
-        </p:txBody>
-      </p:sp>
-      <p:sp>
-        <p:nvSpPr>
-          <p:cNvPr id="3" name="Text 1"/>
-          <p:cNvSpPr/>
-          <p:nvPr/>
-        </p:nvSpPr>
-        <p:spPr>
-          <a:xfrm>
-            <a:off x="457200" y="1188720"/>
-            <a:ext cx="5577840" cy="5212080"/>
-          </a:xfrm>
-          <a:prstGeom prst="rect">
-            <a:avLst/>
-          </a:prstGeom>
-          <a:noFill/>
-          <a:ln/>
-        </p:spPr>
-        <p:txBody>
-          <a:bodyPr wrap="square" lIns="25400" tIns="25400" rIns="25400" bIns="25400" rtlCol="0" anchor="t"/>
-          <a:lstStyle/>
-          <a:p>
-            <a:pPr marL="0" indent="0" algn="l">
-              <a:lnSpc>
-                <a:spcPts val="1400"/>
-              </a:lnSpc>
-              <a:buNone/>
-            </a:pPr>
-            <a:r>
-              <a:rPr lang="en-US" sz="1050" dirty="0">
-                <a:solidFill>
-                  <a:srgbClr val="262626"/>
-                </a:solidFill>
-                <a:latin typeface="Courier New" pitchFamily="34" charset="0"/>
-                <a:ea typeface="Courier New" pitchFamily="34" charset="-122"/>
-                <a:cs typeface="Courier New" pitchFamily="34" charset="-120"/>
-              </a:rPr>
-              <a:t>profiles(user_id_PK, name, goal, height,</a:t>
-            </a:r>
-            <a:endParaRPr lang="en-US" sz="1050" dirty="0"/>
-          </a:p>
-          <a:p>
-            <a:pPr marL="0" indent="0" algn="l">
-              <a:lnSpc>
-                <a:spcPts val="1400"/>
-              </a:lnSpc>
-              <a:buNone/>
-            </a:pPr>
-            <a:r>
-              <a:rPr lang="en-US" sz="1050" dirty="0">
-                <a:solidFill>
-                  <a:srgbClr val="262626"/>
-                </a:solidFill>
-                <a:latin typeface="Courier New" pitchFamily="34" charset="0"/>
-                <a:ea typeface="Courier New" pitchFamily="34" charset="-122"/>
-                <a:cs typeface="Courier New" pitchFamily="34" charset="-120"/>
-              </a:rPr>
-              <a:t>  onboarding_status, approval_status)</a:t>
-            </a:r>
-            <a:endParaRPr lang="en-US" sz="1050" dirty="0"/>
-          </a:p>
-          <a:p>
-            <a:pPr marL="0" indent="0" algn="l">
-              <a:lnSpc>
-                <a:spcPts val="1400"/>
-              </a:lnSpc>
-              <a:buNone/>
-            </a:pPr>
-            <a:endParaRPr lang="en-US" sz="1050" dirty="0"/>
-          </a:p>
-          <a:p>
-            <a:pPr marL="0" indent="0" algn="l">
-              <a:lnSpc>
-                <a:spcPts val="1400"/>
-              </a:lnSpc>
-              <a:buNone/>
-            </a:pPr>
-            <a:r>
-              <a:rPr lang="en-US" sz="1050" dirty="0">
-                <a:solidFill>
-                  <a:srgbClr val="262626"/>
-                </a:solidFill>
-                <a:latin typeface="Courier New" pitchFamily="34" charset="0"/>
-                <a:ea typeface="Courier New" pitchFamily="34" charset="-122"/>
-                <a:cs typeface="Courier New" pitchFamily="34" charset="-120"/>
-              </a:rPr>
-              <a:t>exercises(exercise_id_PK, name, muscle_group,</a:t>
-            </a:r>
-            <a:endParaRPr lang="en-US" sz="1050" dirty="0"/>
-          </a:p>
-          <a:p>
-            <a:pPr marL="0" indent="0" algn="l">
-              <a:lnSpc>
-                <a:spcPts val="1400"/>
-              </a:lnSpc>
-              <a:buNone/>
-            </a:pPr>
-            <a:r>
-              <a:rPr lang="en-US" sz="1050" dirty="0">
-                <a:solidFill>
-                  <a:srgbClr val="262626"/>
-                </a:solidFill>
-                <a:latin typeface="Courier New" pitchFamily="34" charset="0"/>
-                <a:ea typeface="Courier New" pitchFamily="34" charset="-122"/>
-                <a:cs typeface="Courier New" pitchFamily="34" charset="-120"/>
-              </a:rPr>
-              <a:t>  equipment, is_user_added, created_by_FK)</a:t>
-            </a:r>
-            <a:endParaRPr lang="en-US" sz="1050" dirty="0"/>
-          </a:p>
-          <a:p>
-            <a:pPr marL="0" indent="0" algn="l">
-              <a:lnSpc>
-                <a:spcPts val="1400"/>
-              </a:lnSpc>
-              <a:buNone/>
-            </a:pPr>
-            <a:endParaRPr lang="en-US" sz="1050" dirty="0"/>
-          </a:p>
-          <a:p>
-            <a:pPr marL="0" indent="0" algn="l">
-              <a:lnSpc>
-                <a:spcPts val="1400"/>
-              </a:lnSpc>
-              <a:buNone/>
-            </a:pPr>
-            <a:r>
-              <a:rPr lang="en-US" sz="1050" dirty="0">
-                <a:solidFill>
-                  <a:srgbClr val="262626"/>
-                </a:solidFill>
-                <a:latin typeface="Courier New" pitchFamily="34" charset="0"/>
-                <a:ea typeface="Courier New" pitchFamily="34" charset="-122"/>
-                <a:cs typeface="Courier New" pitchFamily="34" charset="-120"/>
-              </a:rPr>
-              <a:t>routines(routine_id_PK, user_id_FK, name, notes)</a:t>
-            </a:r>
-            <a:endParaRPr lang="en-US" sz="1050" dirty="0"/>
-          </a:p>
-          <a:p>
-            <a:pPr marL="0" indent="0" algn="l">
-              <a:lnSpc>
-                <a:spcPts val="1400"/>
-              </a:lnSpc>
-              <a:buNone/>
-            </a:pPr>
-            <a:endParaRPr lang="en-US" sz="1050" dirty="0"/>
-          </a:p>
-          <a:p>
-            <a:pPr marL="0" indent="0" algn="l">
-              <a:lnSpc>
-                <a:spcPts val="1400"/>
-              </a:lnSpc>
-              <a:buNone/>
-            </a:pPr>
-            <a:r>
-              <a:rPr lang="en-US" sz="1050" dirty="0">
-                <a:solidFill>
-                  <a:srgbClr val="262626"/>
-                </a:solidFill>
-                <a:latin typeface="Courier New" pitchFamily="34" charset="0"/>
-                <a:ea typeface="Courier New" pitchFamily="34" charset="-122"/>
-                <a:cs typeface="Courier New" pitchFamily="34" charset="-120"/>
-              </a:rPr>
-              <a:t>routine_exercises(routine_exercise_id_PK,</a:t>
-            </a:r>
-            <a:endParaRPr lang="en-US" sz="1050" dirty="0"/>
-          </a:p>
-          <a:p>
-            <a:pPr marL="0" indent="0" algn="l">
-              <a:lnSpc>
-                <a:spcPts val="1400"/>
-              </a:lnSpc>
-              <a:buNone/>
-            </a:pPr>
-            <a:r>
-              <a:rPr lang="en-US" sz="1050" dirty="0">
-                <a:solidFill>
-                  <a:srgbClr val="262626"/>
-                </a:solidFill>
-                <a:latin typeface="Courier New" pitchFamily="34" charset="0"/>
-                <a:ea typeface="Courier New" pitchFamily="34" charset="-122"/>
-                <a:cs typeface="Courier New" pitchFamily="34" charset="-120"/>
-              </a:rPr>
-              <a:t>  routine_id_FK, exercise_id_FK, order,</a:t>
-            </a:r>
-            <a:endParaRPr lang="en-US" sz="1050" dirty="0"/>
-          </a:p>
-          <a:p>
-            <a:pPr marL="0" indent="0" algn="l">
-              <a:lnSpc>
-                <a:spcPts val="1400"/>
-              </a:lnSpc>
-              <a:buNone/>
-            </a:pPr>
-            <a:r>
-              <a:rPr lang="en-US" sz="1050" dirty="0">
-                <a:solidFill>
-                  <a:srgbClr val="262626"/>
-                </a:solidFill>
-                <a:latin typeface="Courier New" pitchFamily="34" charset="0"/>
-                <a:ea typeface="Courier New" pitchFamily="34" charset="-122"/>
-                <a:cs typeface="Courier New" pitchFamily="34" charset="-120"/>
-              </a:rPr>
-              <a:t>  target_sets, target_reps)</a:t>
-            </a:r>
-            <a:endParaRPr lang="en-US" sz="1050" dirty="0"/>
-          </a:p>
-          <a:p>
-            <a:pPr marL="0" indent="0" algn="l">
-              <a:lnSpc>
-                <a:spcPts val="1400"/>
-              </a:lnSpc>
-              <a:buNone/>
-            </a:pPr>
-            <a:endParaRPr lang="en-US" sz="1050" dirty="0"/>
-          </a:p>
-          <a:p>
-            <a:pPr marL="0" indent="0" algn="l">
-              <a:lnSpc>
-                <a:spcPts val="1400"/>
-              </a:lnSpc>
-              <a:buNone/>
-            </a:pPr>
-            <a:r>
-              <a:rPr lang="en-US" sz="1050" dirty="0">
-                <a:solidFill>
-                  <a:srgbClr val="262626"/>
-                </a:solidFill>
-                <a:latin typeface="Courier New" pitchFamily="34" charset="0"/>
-                <a:ea typeface="Courier New" pitchFamily="34" charset="-122"/>
-                <a:cs typeface="Courier New" pitchFamily="34" charset="-120"/>
-              </a:rPr>
-              <a:t>workout_sessions(session_id_PK, user_id_FK,</a:t>
-            </a:r>
-            <a:endParaRPr lang="en-US" sz="1050" dirty="0"/>
-          </a:p>
-          <a:p>
-            <a:pPr marL="0" indent="0" algn="l">
-              <a:lnSpc>
-                <a:spcPts val="1400"/>
-              </a:lnSpc>
-              <a:buNone/>
-            </a:pPr>
-            <a:r>
-              <a:rPr lang="en-US" sz="1050" dirty="0">
-                <a:solidFill>
-                  <a:srgbClr val="262626"/>
-                </a:solidFill>
-                <a:latin typeface="Courier New" pitchFamily="34" charset="0"/>
-                <a:ea typeface="Courier New" pitchFamily="34" charset="-122"/>
-                <a:cs typeface="Courier New" pitchFamily="34" charset="-120"/>
-              </a:rPr>
-              <a:t>  routine_id_FK, date, start_time, end_time,</a:t>
-            </a:r>
-            <a:endParaRPr lang="en-US" sz="1050" dirty="0"/>
-          </a:p>
-          <a:p>
-            <a:pPr marL="0" indent="0" algn="l">
-              <a:lnSpc>
-                <a:spcPts val="1400"/>
-              </a:lnSpc>
-              <a:buNone/>
-            </a:pPr>
-            <a:r>
-              <a:rPr lang="en-US" sz="1050" dirty="0">
-                <a:solidFill>
-                  <a:srgbClr val="262626"/>
-                </a:solidFill>
-                <a:latin typeface="Courier New" pitchFamily="34" charset="0"/>
-                <a:ea typeface="Courier New" pitchFamily="34" charset="-122"/>
-                <a:cs typeface="Courier New" pitchFamily="34" charset="-120"/>
-              </a:rPr>
-              <a:t>  notes)</a:t>
-            </a:r>
-            <a:endParaRPr lang="en-US" sz="1050" dirty="0"/>
-          </a:p>
-          <a:p>
-            <a:pPr marL="0" indent="0" algn="l">
-              <a:lnSpc>
-                <a:spcPts val="1400"/>
-              </a:lnSpc>
-              <a:buNone/>
-            </a:pPr>
-            <a:endParaRPr lang="en-US" sz="1050" dirty="0"/>
-          </a:p>
-          <a:p>
-            <a:pPr marL="0" indent="0" algn="l">
-              <a:lnSpc>
-                <a:spcPts val="1400"/>
-              </a:lnSpc>
-              <a:buNone/>
-            </a:pPr>
-            <a:r>
-              <a:rPr lang="en-US" sz="1050" dirty="0">
-                <a:solidFill>
-                  <a:srgbClr val="262626"/>
-                </a:solidFill>
-                <a:latin typeface="Courier New" pitchFamily="34" charset="0"/>
-                <a:ea typeface="Courier New" pitchFamily="34" charset="-122"/>
-                <a:cs typeface="Courier New" pitchFamily="34" charset="-120"/>
-              </a:rPr>
-              <a:t>workout_sets(set_id_PK, session_id_FK,</a:t>
-            </a:r>
-            <a:endParaRPr lang="en-US" sz="1050" dirty="0"/>
-          </a:p>
-          <a:p>
-            <a:pPr marL="0" indent="0" algn="l">
-              <a:lnSpc>
-                <a:spcPts val="1400"/>
-              </a:lnSpc>
-              <a:buNone/>
-            </a:pPr>
-            <a:r>
-              <a:rPr lang="en-US" sz="1050" dirty="0">
-                <a:solidFill>
-                  <a:srgbClr val="262626"/>
-                </a:solidFill>
-                <a:latin typeface="Courier New" pitchFamily="34" charset="0"/>
-                <a:ea typeface="Courier New" pitchFamily="34" charset="-122"/>
-                <a:cs typeface="Courier New" pitchFamily="34" charset="-120"/>
-              </a:rPr>
-              <a:t>  exercise_id_FK, weight, reps, is_pr)</a:t>
-            </a:r>
-            <a:endParaRPr lang="en-US" sz="1050" dirty="0"/>
-          </a:p>
-        </p:txBody>
-      </p:sp>
-      <p:sp>
-        <p:nvSpPr>
-          <p:cNvPr id="4" name="Text 2"/>
-          <p:cNvSpPr/>
-          <p:nvPr/>
-        </p:nvSpPr>
-        <p:spPr>
-          <a:xfrm>
-            <a:off x="6172200" y="1188720"/>
-            <a:ext cx="5577840" cy="5212080"/>
-          </a:xfrm>
-          <a:prstGeom prst="rect">
-            <a:avLst/>
-          </a:prstGeom>
-          <a:noFill/>
-          <a:ln/>
-        </p:spPr>
-        <p:txBody>
-          <a:bodyPr wrap="square" lIns="25400" tIns="25400" rIns="25400" bIns="25400" rtlCol="0" anchor="t"/>
-          <a:lstStyle/>
-          <a:p>
-            <a:pPr marL="0" indent="0" algn="l">
-              <a:lnSpc>
-                <a:spcPts val="1400"/>
-              </a:lnSpc>
-              <a:buNone/>
-            </a:pPr>
-            <a:r>
-              <a:rPr lang="en-US" sz="1050" dirty="0">
-                <a:solidFill>
-                  <a:srgbClr val="262626"/>
-                </a:solidFill>
-                <a:latin typeface="Courier New" pitchFamily="34" charset="0"/>
-                <a:ea typeface="Courier New" pitchFamily="34" charset="-122"/>
-                <a:cs typeface="Courier New" pitchFamily="34" charset="-120"/>
-              </a:rPr>
-              <a:t>foods(food_id_PK, user_id_FK, name,</a:t>
-            </a:r>
-            <a:endParaRPr lang="en-US" sz="1050" dirty="0"/>
-          </a:p>
-          <a:p>
-            <a:pPr marL="0" indent="0" algn="l">
-              <a:lnSpc>
-                <a:spcPts val="1400"/>
-              </a:lnSpc>
-              <a:buNone/>
-            </a:pPr>
-            <a:r>
-              <a:rPr lang="en-US" sz="1050" dirty="0">
-                <a:solidFill>
-                  <a:srgbClr val="262626"/>
-                </a:solidFill>
-                <a:latin typeface="Courier New" pitchFamily="34" charset="0"/>
-                <a:ea typeface="Courier New" pitchFamily="34" charset="-122"/>
-                <a:cs typeface="Courier New" pitchFamily="34" charset="-120"/>
-              </a:rPr>
-              <a:t>  calories_per_100g, protein, carbs, fat,</a:t>
-            </a:r>
-            <a:endParaRPr lang="en-US" sz="1050" dirty="0"/>
-          </a:p>
-          <a:p>
-            <a:pPr marL="0" indent="0" algn="l">
-              <a:lnSpc>
-                <a:spcPts val="1400"/>
-              </a:lnSpc>
-              <a:buNone/>
-            </a:pPr>
-            <a:r>
-              <a:rPr lang="en-US" sz="1050" dirty="0">
-                <a:solidFill>
-                  <a:srgbClr val="262626"/>
-                </a:solidFill>
-                <a:latin typeface="Courier New" pitchFamily="34" charset="0"/>
-                <a:ea typeface="Courier New" pitchFamily="34" charset="-122"/>
-                <a:cs typeface="Courier New" pitchFamily="34" charset="-120"/>
-              </a:rPr>
-              <a:t>  is_custom)</a:t>
-            </a:r>
-            <a:endParaRPr lang="en-US" sz="1050" dirty="0"/>
-          </a:p>
-          <a:p>
-            <a:pPr marL="0" indent="0" algn="l">
-              <a:lnSpc>
-                <a:spcPts val="1400"/>
-              </a:lnSpc>
-              <a:buNone/>
-            </a:pPr>
-            <a:endParaRPr lang="en-US" sz="1050" dirty="0"/>
-          </a:p>
-          <a:p>
-            <a:pPr marL="0" indent="0" algn="l">
-              <a:lnSpc>
-                <a:spcPts val="1400"/>
-              </a:lnSpc>
-              <a:buNone/>
-            </a:pPr>
-            <a:r>
-              <a:rPr lang="en-US" sz="1050" dirty="0">
-                <a:solidFill>
-                  <a:srgbClr val="262626"/>
-                </a:solidFill>
-                <a:latin typeface="Courier New" pitchFamily="34" charset="0"/>
-                <a:ea typeface="Courier New" pitchFamily="34" charset="-122"/>
-                <a:cs typeface="Courier New" pitchFamily="34" charset="-120"/>
-              </a:rPr>
-              <a:t>food_logs(food_log_id_PK, user_id_FK,</a:t>
-            </a:r>
-            <a:endParaRPr lang="en-US" sz="1050" dirty="0"/>
-          </a:p>
-          <a:p>
-            <a:pPr marL="0" indent="0" algn="l">
-              <a:lnSpc>
-                <a:spcPts val="1400"/>
-              </a:lnSpc>
-              <a:buNone/>
-            </a:pPr>
-            <a:r>
-              <a:rPr lang="en-US" sz="1050" dirty="0">
-                <a:solidFill>
-                  <a:srgbClr val="262626"/>
-                </a:solidFill>
-                <a:latin typeface="Courier New" pitchFamily="34" charset="0"/>
-                <a:ea typeface="Courier New" pitchFamily="34" charset="-122"/>
-                <a:cs typeface="Courier New" pitchFamily="34" charset="-120"/>
-              </a:rPr>
-              <a:t>  food_id_FK, quantity, meal_type, date)</a:t>
-            </a:r>
-            <a:endParaRPr lang="en-US" sz="1050" dirty="0"/>
-          </a:p>
-          <a:p>
-            <a:pPr marL="0" indent="0" algn="l">
-              <a:lnSpc>
-                <a:spcPts val="1400"/>
-              </a:lnSpc>
-              <a:buNone/>
-            </a:pPr>
-            <a:endParaRPr lang="en-US" sz="1050" dirty="0"/>
-          </a:p>
-          <a:p>
-            <a:pPr marL="0" indent="0" algn="l">
-              <a:lnSpc>
-                <a:spcPts val="1400"/>
-              </a:lnSpc>
-              <a:buNone/>
-            </a:pPr>
-            <a:r>
-              <a:rPr lang="en-US" sz="1050" dirty="0">
-                <a:solidFill>
-                  <a:srgbClr val="262626"/>
-                </a:solidFill>
-                <a:latin typeface="Courier New" pitchFamily="34" charset="0"/>
-                <a:ea typeface="Courier New" pitchFamily="34" charset="-122"/>
-                <a:cs typeface="Courier New" pitchFamily="34" charset="-120"/>
-              </a:rPr>
-              <a:t>nutrition_targets(target_id_PK, user_id_FK,</a:t>
-            </a:r>
-            <a:endParaRPr lang="en-US" sz="1050" dirty="0"/>
-          </a:p>
-          <a:p>
-            <a:pPr marL="0" indent="0" algn="l">
-              <a:lnSpc>
-                <a:spcPts val="1400"/>
-              </a:lnSpc>
-              <a:buNone/>
-            </a:pPr>
-            <a:r>
-              <a:rPr lang="en-US" sz="1050" dirty="0">
-                <a:solidFill>
-                  <a:srgbClr val="262626"/>
-                </a:solidFill>
-                <a:latin typeface="Courier New" pitchFamily="34" charset="0"/>
-                <a:ea typeface="Courier New" pitchFamily="34" charset="-122"/>
-                <a:cs typeface="Courier New" pitchFamily="34" charset="-120"/>
-              </a:rPr>
-              <a:t>  date, calorie_target, protein_target,</a:t>
-            </a:r>
-            <a:endParaRPr lang="en-US" sz="1050" dirty="0"/>
-          </a:p>
-          <a:p>
-            <a:pPr marL="0" indent="0" algn="l">
-              <a:lnSpc>
-                <a:spcPts val="1400"/>
-              </a:lnSpc>
-              <a:buNone/>
-            </a:pPr>
-            <a:r>
-              <a:rPr lang="en-US" sz="1050" dirty="0">
-                <a:solidFill>
-                  <a:srgbClr val="262626"/>
-                </a:solidFill>
-                <a:latin typeface="Courier New" pitchFamily="34" charset="0"/>
-                <a:ea typeface="Courier New" pitchFamily="34" charset="-122"/>
-                <a:cs typeface="Courier New" pitchFamily="34" charset="-120"/>
-              </a:rPr>
-              <a:t>  carbs_target, fat_target, source)</a:t>
-            </a:r>
-            <a:endParaRPr lang="en-US" sz="1050" dirty="0"/>
-          </a:p>
-          <a:p>
-            <a:pPr marL="0" indent="0" algn="l">
-              <a:lnSpc>
-                <a:spcPts val="1400"/>
-              </a:lnSpc>
-              <a:buNone/>
-            </a:pPr>
-            <a:endParaRPr lang="en-US" sz="1050" dirty="0"/>
-          </a:p>
-          <a:p>
-            <a:pPr marL="0" indent="0" algn="l">
-              <a:lnSpc>
-                <a:spcPts val="1400"/>
-              </a:lnSpc>
-              <a:buNone/>
-            </a:pPr>
-            <a:r>
-              <a:rPr lang="en-US" sz="1050" dirty="0">
-                <a:solidFill>
-                  <a:srgbClr val="262626"/>
-                </a:solidFill>
-                <a:latin typeface="Courier New" pitchFamily="34" charset="0"/>
-                <a:ea typeface="Courier New" pitchFamily="34" charset="-122"/>
-                <a:cs typeface="Courier New" pitchFamily="34" charset="-120"/>
-              </a:rPr>
-              <a:t>tdee_estimates(tdee_id_PK, user_id_FK, date,</a:t>
-            </a:r>
-            <a:endParaRPr lang="en-US" sz="1050" dirty="0"/>
-          </a:p>
-          <a:p>
-            <a:pPr marL="0" indent="0" algn="l">
-              <a:lnSpc>
-                <a:spcPts val="1400"/>
-              </a:lnSpc>
-              <a:buNone/>
-            </a:pPr>
-            <a:r>
-              <a:rPr lang="en-US" sz="1050" dirty="0">
-                <a:solidFill>
-                  <a:srgbClr val="262626"/>
-                </a:solidFill>
-                <a:latin typeface="Courier New" pitchFamily="34" charset="0"/>
-                <a:ea typeface="Courier New" pitchFamily="34" charset="-122"/>
-                <a:cs typeface="Courier New" pitchFamily="34" charset="-120"/>
-              </a:rPr>
-              <a:t>  estimated_tdee)</a:t>
-            </a:r>
-            <a:endParaRPr lang="en-US" sz="1050" dirty="0"/>
-          </a:p>
-          <a:p>
-            <a:pPr marL="0" indent="0" algn="l">
-              <a:lnSpc>
-                <a:spcPts val="1400"/>
-              </a:lnSpc>
-              <a:buNone/>
-            </a:pPr>
-            <a:endParaRPr lang="en-US" sz="1050" dirty="0"/>
-          </a:p>
-          <a:p>
-            <a:pPr marL="0" indent="0" algn="l">
-              <a:lnSpc>
-                <a:spcPts val="1400"/>
-              </a:lnSpc>
-              <a:buNone/>
-            </a:pPr>
-            <a:r>
-              <a:rPr lang="en-US" sz="1050" dirty="0">
-                <a:solidFill>
-                  <a:srgbClr val="262626"/>
-                </a:solidFill>
-                <a:latin typeface="Courier New" pitchFamily="34" charset="0"/>
-                <a:ea typeface="Courier New" pitchFamily="34" charset="-122"/>
-                <a:cs typeface="Courier New" pitchFamily="34" charset="-120"/>
-              </a:rPr>
-              <a:t>dismissed_suggestions(dismissal_id_PK,</a:t>
-            </a:r>
-            <a:endParaRPr lang="en-US" sz="1050" dirty="0"/>
-          </a:p>
-          <a:p>
-            <a:pPr marL="0" indent="0" algn="l">
-              <a:lnSpc>
-                <a:spcPts val="1400"/>
-              </a:lnSpc>
-              <a:buNone/>
-            </a:pPr>
-            <a:r>
-              <a:rPr lang="en-US" sz="1050" dirty="0">
-                <a:solidFill>
-                  <a:srgbClr val="262626"/>
-                </a:solidFill>
-                <a:latin typeface="Courier New" pitchFamily="34" charset="0"/>
-                <a:ea typeface="Courier New" pitchFamily="34" charset="-122"/>
-                <a:cs typeface="Courier New" pitchFamily="34" charset="-120"/>
-              </a:rPr>
-              <a:t>  user_id_FK, suggestion_type, dismissed_at)</a:t>
-            </a:r>
-            <a:endParaRPr lang="en-US" sz="1050" dirty="0"/>
-          </a:p>
-          <a:p>
-            <a:pPr marL="0" indent="0" algn="l">
-              <a:lnSpc>
-                <a:spcPts val="1400"/>
-              </a:lnSpc>
-              <a:buNone/>
-            </a:pPr>
-            <a:endParaRPr lang="en-US" sz="1050" dirty="0"/>
-          </a:p>
-          <a:p>
-            <a:pPr marL="0" indent="0" algn="l">
-              <a:lnSpc>
-                <a:spcPts val="1400"/>
-              </a:lnSpc>
-              <a:buNone/>
-            </a:pPr>
-            <a:r>
-              <a:rPr lang="en-US" sz="1050" dirty="0">
-                <a:solidFill>
-                  <a:srgbClr val="262626"/>
-                </a:solidFill>
-                <a:latin typeface="Courier New" pitchFamily="34" charset="0"/>
-                <a:ea typeface="Courier New" pitchFamily="34" charset="-122"/>
-                <a:cs typeface="Courier New" pitchFamily="34" charset="-120"/>
-              </a:rPr>
-              <a:t>body_metrics(metric_id_PK, user_id_FK, date,</a:t>
-            </a:r>
-            <a:endParaRPr lang="en-US" sz="1050" dirty="0"/>
-          </a:p>
-          <a:p>
-            <a:pPr marL="0" indent="0" algn="l">
-              <a:lnSpc>
-                <a:spcPts val="1400"/>
-              </a:lnSpc>
-              <a:buNone/>
-            </a:pPr>
-            <a:r>
-              <a:rPr lang="en-US" sz="1050" dirty="0">
-                <a:solidFill>
-                  <a:srgbClr val="262626"/>
-                </a:solidFill>
-                <a:latin typeface="Courier New" pitchFamily="34" charset="0"/>
-                <a:ea typeface="Courier New" pitchFamily="34" charset="-122"/>
-                <a:cs typeface="Courier New" pitchFamily="34" charset="-120"/>
-              </a:rPr>
-              <a:t>  weight, waist, chest, arm, photo_url)</a:t>
-            </a:r>
-            <a:endParaRPr lang="en-US" sz="1050" dirty="0"/>
-          </a:p>
-        </p:txBody>
-      </p:sp>
-      <p:sp>
-        <p:nvSpPr>
-          <p:cNvPr id="5" name="Text 3"/>
-          <p:cNvSpPr/>
-          <p:nvPr/>
-        </p:nvSpPr>
-        <p:spPr>
-          <a:xfrm>
-            <a:off x="11612880" y="6537960"/>
-            <a:ext cx="457200" cy="274320"/>
-          </a:xfrm>
-          <a:prstGeom prst="rect">
-            <a:avLst/>
-          </a:prstGeom>
-          <a:noFill/>
-          <a:ln/>
-        </p:spPr>
-        <p:txBody>
-          <a:bodyPr wrap="square" lIns="0" tIns="0" rIns="0" bIns="0" rtlCol="0" anchor="ctr"/>
-          <a:lstStyle/>
-          <a:p>
-            <a:pPr marL="0" indent="0" algn="r">
-              <a:buNone/>
-            </a:pPr>
-            <a:r>
-              <a:rPr lang="en-US" sz="1000" dirty="0">
-                <a:solidFill>
-                  <a:srgbClr val="8C8C8C"/>
-                </a:solidFill>
-                <a:latin typeface="Calibri" pitchFamily="34" charset="0"/>
-                <a:ea typeface="Calibri" pitchFamily="34" charset="-122"/>
-                <a:cs typeface="Calibri" pitchFamily="34" charset="-120"/>
-              </a:rPr>
-              <a:t>9</a:t>
-            </a:r>
-            <a:endParaRPr lang="en-US" sz="1000" dirty="0"/>
-          </a:p>
-        </p:txBody>
-      </p:sp>
-      <p:sp>
-        <p:nvSpPr>
-          <p:cNvPr id="6" name="Text 4"/>
           <p:cNvSpPr/>
           <p:nvPr/>
         </p:nvSpPr>
